--- a/work/幸福_第2回/幸福_第2回.pptx
+++ b/work/幸福_第2回/幸福_第2回.pptx
@@ -1407,7 +1407,7 @@
           <a:lstStyle/>
           <a:p>
             <a:r>
-              <a:t>約4分。エリス、ベックが述べた箇所の書誌は、要確認（授業前に原典で確かめる）。エピクテトスの「人は、物事ではなく、物事についての考えに乱される」という趣旨の言葉が、よく引かれる（『提要』第5節。要確認）。</a:t>
+              <a:t>約4分。エリス、ベックが述べた箇所と刊行年は、授業前に原典で確かめる（要確認）。エピクテトスの「人は、物事ではなく、物事についての考えに乱される」という趣旨の言葉が、よく引かれる（『提要』第5節。要確認）。</a:t>
             </a:r>
           </a:p>
         </p:txBody>
@@ -1757,7 +1757,7 @@
           <a:lstStyle/>
           <a:p>
             <a:r>
-              <a:t>約4分。身長の例は、遺伝率と変えやすさが別であることを示す標準的な例である（数値は出さない）。双生児研究が示したのは、集団の個人差の説明であり、一人の幸福感が動かないという主張ではない。</a:t>
+              <a:t>約4分。見直す対象は、7頁（ここまでの結論）の「親ガチャ」の読み。身長の例は、遺伝率と変えやすさが別であることを示す標準的な例である（数値は出さない）。双生児研究が示したのは、集団の個人差の説明であり、一人の幸福感が動かないという主張ではない。</a:t>
             </a:r>
           </a:p>
         </p:txBody>
@@ -2457,7 +2457,7 @@
           <a:lstStyle/>
           <a:p>
             <a:r>
-              <a:t>書誌のうち、巻号・頁を欠くものは、授業前に確かめて補う。</a:t>
+              <a:t>書誌の巻号・頁・刊行年は記憶と検索による。Brown &amp; Rohrer の頁、Brickman &amp; Campbell の頁、Ellis と Beck の刊行年は、授業前に確かめて補う。</a:t>
             </a:r>
           </a:p>
         </p:txBody>
@@ -6966,7 +6966,7 @@
                 <a:latin typeface="Noto Sans JP"/>
                 <a:ea typeface="Noto Sans JP"/>
               </a:rPr>
-              <a:t>健康、富、めぐり合わせ</a:t>
+              <a:t>健康、富、権力</a:t>
             </a:r>
           </a:p>
         </p:txBody>
@@ -7425,7 +7425,7 @@
                 <a:latin typeface="Noto Sans JP"/>
                 <a:ea typeface="Noto Sans JP"/>
               </a:rPr>
-              <a:t>10頁の要旨を読み、置き換えの怪しい点を一つ書く。</a:t>
+              <a:t>前のページ（プラトン『エウテュデモス』）の要旨を読み、置き換えの怪しい点を一つ書く。</a:t>
             </a:r>
           </a:p>
         </p:txBody>
@@ -8373,7 +8373,7 @@
                 <a:latin typeface="Noto Sans JP"/>
                 <a:ea typeface="Noto Sans JP"/>
               </a:rPr>
-              <a:t>講義を弟子が書き留めた記録。『提要』はその手引き</a:t>
+              <a:t>講義を弟子が書き留めた。『提要』はその手引き</a:t>
             </a:r>
           </a:p>
         </p:txBody>
@@ -8566,7 +8566,47 @@
                 <a:latin typeface="Noto Sans JP"/>
                 <a:ea typeface="Noto Sans JP"/>
               </a:rPr>
-              <a:t>ものごとには、自分次第のものと、自分次第でないものがある。</a:t>
+              <a:t>ものごとには、</a:t>
+            </a:r>
+            <a:r>
+              <a:rPr sz="2200" b="1" lang="ja-JP">
+                <a:solidFill>
+                  <a:srgbClr val="1A1A1A"/>
+                </a:solidFill>
+                <a:latin typeface="Noto Sans JP"/>
+                <a:ea typeface="Noto Sans JP"/>
+              </a:rPr>
+              <a:t>自分次第のもの</a:t>
+            </a:r>
+            <a:r>
+              <a:rPr sz="2200" b="0" lang="ja-JP">
+                <a:solidFill>
+                  <a:srgbClr val="1A1A1A"/>
+                </a:solidFill>
+                <a:latin typeface="Noto Sans JP"/>
+                <a:ea typeface="Noto Sans JP"/>
+              </a:rPr>
+              <a:t>と、</a:t>
+            </a:r>
+            <a:r>
+              <a:rPr sz="2200" b="1" lang="ja-JP">
+                <a:solidFill>
+                  <a:srgbClr val="1A1A1A"/>
+                </a:solidFill>
+                <a:latin typeface="Noto Sans JP"/>
+                <a:ea typeface="Noto Sans JP"/>
+              </a:rPr>
+              <a:t>自分次第でないもの</a:t>
+            </a:r>
+            <a:r>
+              <a:rPr sz="2200" b="0" lang="ja-JP">
+                <a:solidFill>
+                  <a:srgbClr val="1A1A1A"/>
+                </a:solidFill>
+                <a:latin typeface="Noto Sans JP"/>
+                <a:ea typeface="Noto Sans JP"/>
+              </a:rPr>
+              <a:t>がある。</a:t>
             </a:r>
           </a:p>
           <a:p>
@@ -8582,14 +8622,44 @@
               </a:spcAft>
             </a:pPr>
             <a:r>
-              <a:rPr sz="2200" b="0" lang="ja-JP">
+              <a:rPr sz="2200" b="1" lang="ja-JP">
                 <a:solidFill>
                   <a:srgbClr val="1A1A1A"/>
                 </a:solidFill>
                 <a:latin typeface="Noto Sans JP"/>
                 <a:ea typeface="Noto Sans JP"/>
               </a:rPr>
-              <a:t>自分次第のものは、判断、衝動、欲求、嫌悪、つまり自分の行いである。自分次第でないものは、身体、財産、評判、地位、つまり自分の行いでないものである。</a:t>
+              <a:t>自分次第のもの</a:t>
+            </a:r>
+            <a:r>
+              <a:rPr sz="2200" b="0" lang="ja-JP">
+                <a:solidFill>
+                  <a:srgbClr val="1A1A1A"/>
+                </a:solidFill>
+                <a:latin typeface="Noto Sans JP"/>
+                <a:ea typeface="Noto Sans JP"/>
+              </a:rPr>
+              <a:t>は、判断、衝動、欲求、嫌悪、つまり自分の行いである。</a:t>
+            </a:r>
+            <a:r>
+              <a:rPr sz="2200" b="1" lang="ja-JP">
+                <a:solidFill>
+                  <a:srgbClr val="1A1A1A"/>
+                </a:solidFill>
+                <a:latin typeface="Noto Sans JP"/>
+                <a:ea typeface="Noto Sans JP"/>
+              </a:rPr>
+              <a:t>自分次第でないもの</a:t>
+            </a:r>
+            <a:r>
+              <a:rPr sz="2200" b="0" lang="ja-JP">
+                <a:solidFill>
+                  <a:srgbClr val="1A1A1A"/>
+                </a:solidFill>
+                <a:latin typeface="Noto Sans JP"/>
+                <a:ea typeface="Noto Sans JP"/>
+              </a:rPr>
+              <a:t>は、身体、財産、評判、地位、つまり自分の行いでないものである。</a:t>
             </a:r>
           </a:p>
           <a:p>
@@ -8605,14 +8675,24 @@
               </a:spcAft>
             </a:pPr>
             <a:r>
-              <a:rPr sz="2200" b="0" lang="ja-JP">
+              <a:rPr sz="2200" b="1" lang="ja-JP">
                 <a:solidFill>
                   <a:srgbClr val="1A1A1A"/>
                 </a:solidFill>
                 <a:latin typeface="Noto Sans JP"/>
                 <a:ea typeface="Noto Sans JP"/>
               </a:rPr>
-              <a:t>自分次第でないものを自分のものと思えば、妨げられ、嘆き、乱される。自分のものだけを自分のものと思えば、誰も自分を強制できない。</a:t>
+              <a:t>自分次第でないもの</a:t>
+            </a:r>
+            <a:r>
+              <a:rPr sz="2200" b="0" lang="ja-JP">
+                <a:solidFill>
+                  <a:srgbClr val="1A1A1A"/>
+                </a:solidFill>
+                <a:latin typeface="Noto Sans JP"/>
+                <a:ea typeface="Noto Sans JP"/>
+              </a:rPr>
+              <a:t>を自分のものと思えば、妨げられ、嘆き、乱される。自分のものだけを自分のものと思えば、誰も自分を強制できない。</a:t>
             </a:r>
           </a:p>
         </p:txBody>
@@ -8720,14 +8800,14 @@
       </p:sp>
       <p:sp>
         <p:nvSpPr>
-          <p:cNvPr id="4" name="自分次第の面"/>
+          <p:cNvPr id="4" name="自分次第（自分の行い）の面"/>
           <p:cNvSpPr/>
           <p:nvPr/>
         </p:nvSpPr>
         <p:spPr>
           <a:xfrm>
             <a:off x="609600" y="1752600"/>
-            <a:ext cx="5181600" cy="3550920"/>
+            <a:ext cx="5181600" cy="3482340"/>
           </a:xfrm>
           <a:prstGeom prst="rect">
             <a:avLst/>
@@ -8758,7 +8838,7 @@
         <p:spPr>
           <a:xfrm>
             <a:off x="914400" y="2019300"/>
-            <a:ext cx="4572000" cy="3017520"/>
+            <a:ext cx="4572000" cy="2522220"/>
           </a:xfrm>
           <a:prstGeom prst="rect">
             <a:avLst/>
@@ -8790,7 +8870,7 @@
                 <a:latin typeface="Noto Sans JP"/>
                 <a:ea typeface="Noto Sans JP"/>
               </a:rPr>
-              <a:t>自分次第</a:t>
+              <a:t>自分次第（自分の行い）</a:t>
             </a:r>
           </a:p>
           <a:p>
@@ -8905,46 +8985,18 @@
               <a:t>嫌悪</a:t>
             </a:r>
           </a:p>
-          <a:p>
-            <a:pPr algn="l" marL="266700" indent="-266700">
-              <a:lnSpc>
-                <a:spcPts val="3300"/>
-              </a:lnSpc>
-              <a:spcBef>
-                <a:spcPts val="0"/>
-              </a:spcBef>
-              <a:spcAft>
-                <a:spcPts val="600"/>
-              </a:spcAft>
-              <a:buClr>
-                <a:srgbClr val="0017C1"/>
-              </a:buClr>
-              <a:buFont typeface="Arial"/>
-              <a:buChar char="•"/>
-            </a:pPr>
-            <a:r>
-              <a:rPr sz="2200" b="0" lang="ja-JP">
-                <a:solidFill>
-                  <a:srgbClr val="1A1A1A"/>
-                </a:solidFill>
-                <a:latin typeface="Noto Sans JP"/>
-                <a:ea typeface="Noto Sans JP"/>
-              </a:rPr>
-              <a:t>自分の行い</a:t>
-            </a:r>
-          </a:p>
-        </p:txBody>
-      </p:sp>
-      <p:sp>
-        <p:nvSpPr>
-          <p:cNvPr id="6" name="自分次第でないの面"/>
+        </p:txBody>
+      </p:sp>
+      <p:sp>
+        <p:nvSpPr>
+          <p:cNvPr id="6" name="自分次第でない（自分の行いでない）の面"/>
           <p:cNvSpPr/>
           <p:nvPr/>
         </p:nvSpPr>
         <p:spPr>
           <a:xfrm>
             <a:off x="6400800" y="1752600"/>
-            <a:ext cx="5181600" cy="3550920"/>
+            <a:ext cx="5181600" cy="3482340"/>
           </a:xfrm>
           <a:prstGeom prst="rect">
             <a:avLst/>
@@ -8975,7 +9027,7 @@
         <p:spPr>
           <a:xfrm>
             <a:off x="6705600" y="2019300"/>
-            <a:ext cx="4572000" cy="2522220"/>
+            <a:ext cx="4572000" cy="2948940"/>
           </a:xfrm>
           <a:prstGeom prst="rect">
             <a:avLst/>
@@ -9007,7 +9059,7 @@
                 <a:latin typeface="Noto Sans JP"/>
                 <a:ea typeface="Noto Sans JP"/>
               </a:rPr>
-              <a:t>自分次第でない</a:t>
+              <a:t>自分次第でない（自分の行いでない）</a:t>
             </a:r>
           </a:p>
           <a:p>
@@ -9132,7 +9184,7 @@
         </p:nvSpPr>
         <p:spPr>
           <a:xfrm>
-            <a:off x="609600" y="5646420"/>
+            <a:off x="609600" y="5577840"/>
             <a:ext cx="10972800" cy="419100"/>
           </a:xfrm>
           <a:prstGeom prst="rect">
@@ -9266,14 +9318,14 @@
                 <a:latin typeface="Noto Sans JP"/>
                 <a:ea typeface="Noto Sans JP"/>
               </a:rPr>
-              <a:t>ストア派の答えと、前回の定義</a:t>
+              <a:t>ストア派の答えと前回の定義</a:t>
             </a:r>
           </a:p>
         </p:txBody>
       </p:sp>
       <p:graphicFrame>
         <p:nvGraphicFramePr>
-          <p:cNvPr id="4" name="表" descr="ストア派の答えと、前回の定義の表"/>
+          <p:cNvPr id="4" name="表" descr="ストア派の答えと前回の定義の表"/>
           <p:cNvGraphicFramePr>
             <a:graphicFrameLocks noGrp="1"/>
           </p:cNvGraphicFramePr>
@@ -9976,14 +10028,24 @@
               <a:buChar char="•"/>
             </a:pPr>
             <a:r>
-              <a:rPr sz="2200" b="0" lang="ja-JP">
+              <a:rPr sz="2200" b="1" lang="ja-JP">
                 <a:solidFill>
                   <a:srgbClr val="1A1A1A"/>
                 </a:solidFill>
                 <a:latin typeface="Noto Sans JP"/>
                 <a:ea typeface="Noto Sans JP"/>
               </a:rPr>
-              <a:t>認知行動療法の創始者たちは、ストア派に学んだと述べている</a:t>
+              <a:t>創始者たちの言及　</a:t>
+            </a:r>
+            <a:r>
+              <a:rPr sz="2200" b="0" lang="ja-JP">
+                <a:solidFill>
+                  <a:srgbClr val="1A1A1A"/>
+                </a:solidFill>
+                <a:latin typeface="Noto Sans JP"/>
+                <a:ea typeface="Noto Sans JP"/>
+              </a:rPr>
+              <a:t>ストア派に学んだとの言明</a:t>
             </a:r>
           </a:p>
           <a:p>
@@ -10021,7 +10083,7 @@
                 <a:latin typeface="Noto Sans JP"/>
                 <a:ea typeface="Noto Sans JP"/>
               </a:rPr>
-              <a:t>合理情動行動療法の原理の多くは、ストア派がすでに述べていた</a:t>
+              <a:t>合理情動行動療法の原理の多くを、ストア派が先に述べていたとする言明</a:t>
             </a:r>
           </a:p>
           <a:p>
@@ -10059,7 +10121,7 @@
                 <a:latin typeface="Noto Sans JP"/>
                 <a:ea typeface="Noto Sans JP"/>
               </a:rPr>
-              <a:t>認知療法の哲学上の源は、ストア派にさかのぼる</a:t>
+              <a:t>認知療法の哲学上の源を、ストア派にさかのぼるとする言明</a:t>
             </a:r>
           </a:p>
           <a:p>
@@ -10097,7 +10159,76 @@
                 <a:latin typeface="Noto Sans JP"/>
                 <a:ea typeface="Noto Sans JP"/>
               </a:rPr>
-              <a:t>出来事そのものより、その受け取り方を変える</a:t>
+              <a:t>出来事そのものより、その受け取り方を変えるという発想</a:t>
+            </a:r>
+          </a:p>
+        </p:txBody>
+      </p:sp>
+      <p:sp>
+        <p:nvSpPr>
+          <p:cNvPr id="5" name="TextBox 4"/>
+          <p:cNvSpPr txBox="1"/>
+          <p:nvPr/>
+        </p:nvSpPr>
+        <p:spPr>
+          <a:xfrm>
+            <a:off x="609600" y="4152900"/>
+            <a:ext cx="10972800" cy="497840"/>
+          </a:xfrm>
+          <a:prstGeom prst="rect">
+            <a:avLst/>
+          </a:prstGeom>
+          <a:noFill/>
+        </p:spPr>
+        <p:txBody>
+          <a:bodyPr wrap="square" lIns="0" rIns="0" tIns="0" bIns="0" anchor="t">
+            <a:noAutofit/>
+          </a:bodyPr>
+          <a:lstStyle/>
+          <a:p>
+            <a:pPr algn="l">
+              <a:lnSpc>
+                <a:spcPts val="1959"/>
+              </a:lnSpc>
+              <a:spcBef>
+                <a:spcPts val="0"/>
+              </a:spcBef>
+              <a:spcAft>
+                <a:spcPts val="0"/>
+              </a:spcAft>
+            </a:pPr>
+            <a:r>
+              <a:rPr sz="1400" b="0" lang="ja-JP">
+                <a:solidFill>
+                  <a:srgbClr val="666666"/>
+                </a:solidFill>
+                <a:latin typeface="Noto Sans JP"/>
+                <a:ea typeface="Noto Sans JP"/>
+              </a:rPr>
+              <a:t>出典：Ellis (1962) Reason and Emotion in Psychotherapy</a:t>
+            </a:r>
+          </a:p>
+          <a:p>
+            <a:pPr algn="l">
+              <a:lnSpc>
+                <a:spcPts val="1959"/>
+              </a:lnSpc>
+              <a:spcBef>
+                <a:spcPts val="0"/>
+              </a:spcBef>
+              <a:spcAft>
+                <a:spcPts val="0"/>
+              </a:spcAft>
+            </a:pPr>
+            <a:r>
+              <a:rPr sz="1400" b="0" lang="ja-JP">
+                <a:solidFill>
+                  <a:srgbClr val="666666"/>
+                </a:solidFill>
+                <a:latin typeface="Noto Sans JP"/>
+                <a:ea typeface="Noto Sans JP"/>
+              </a:rPr>
+              <a:t>　　　Beck (1976) Cognitive Therapy and the Emotional Disorders</a:t>
             </a:r>
           </a:p>
         </p:txBody>
@@ -10198,7 +10329,7 @@
                 <a:latin typeface="Noto Sans JP"/>
                 <a:ea typeface="Noto Sans JP"/>
               </a:rPr>
-              <a:t>ポジティブ心理学と、意図的な活動の割合</a:t>
+              <a:t>ポジティブ心理学と意図的な活動の割合</a:t>
             </a:r>
           </a:p>
         </p:txBody>
@@ -10212,7 +10343,7 @@
         <p:spPr>
           <a:xfrm>
             <a:off x="609600" y="1676400"/>
-            <a:ext cx="5143500" cy="3200400"/>
+            <a:ext cx="5715000" cy="2781300"/>
           </a:xfrm>
           <a:prstGeom prst="rect">
             <a:avLst/>
@@ -10281,8 +10412,8 @@
           <p:nvPr/>
         </p:nvGraphicFramePr>
         <p:xfrm>
-          <a:off x="6286500" y="1600200"/>
-          <a:ext cx="5295900" cy="4095750"/>
+          <a:off x="6858000" y="1600200"/>
+          <a:ext cx="4724400" cy="4095750"/>
         </p:xfrm>
         <a:graphic>
           <a:graphicData uri="http://schemas.openxmlformats.org/drawingml/2006/chart">
@@ -10298,8 +10429,8 @@
         </p:nvSpPr>
         <p:spPr>
           <a:xfrm>
-            <a:off x="6286500" y="5753100"/>
-            <a:ext cx="5295900" cy="248920"/>
+            <a:off x="6858000" y="5753100"/>
+            <a:ext cx="4724400" cy="248920"/>
           </a:xfrm>
           <a:prstGeom prst="rect">
             <a:avLst/>
@@ -11439,14 +11570,24 @@
               <a:buChar char="•"/>
             </a:pPr>
             <a:r>
-              <a:rPr sz="2200" b="0" lang="ja-JP">
+              <a:rPr sz="2200" b="1" lang="ja-JP">
                 <a:solidFill>
                   <a:srgbClr val="1A1A1A"/>
                 </a:solidFill>
                 <a:latin typeface="Noto Sans JP"/>
                 <a:ea typeface="Noto Sans JP"/>
               </a:rPr>
-              <a:t>割合は、集団の個人差の説明割合である。一人の幸福感の内訳ではない</a:t>
+              <a:t>割合の意味　</a:t>
+            </a:r>
+            <a:r>
+              <a:rPr sz="2200" b="0" lang="ja-JP">
+                <a:solidFill>
+                  <a:srgbClr val="1A1A1A"/>
+                </a:solidFill>
+                <a:latin typeface="Noto Sans JP"/>
+                <a:ea typeface="Noto Sans JP"/>
+              </a:rPr>
+              <a:t>集団の個人差の説明割合であり、一人の幸福感の内訳ではないこと</a:t>
             </a:r>
           </a:p>
           <a:p>
@@ -11467,14 +11608,24 @@
               <a:buChar char="•"/>
             </a:pPr>
             <a:r>
-              <a:rPr sz="2200" b="0" lang="ja-JP">
+              <a:rPr sz="2200" b="1" lang="ja-JP">
                 <a:solidFill>
                   <a:srgbClr val="1A1A1A"/>
                 </a:solidFill>
                 <a:latin typeface="Noto Sans JP"/>
                 <a:ea typeface="Noto Sans JP"/>
               </a:rPr>
-              <a:t>集団で当てはまる数字が、個人にも当てはまるとは限らない</a:t>
+              <a:t>集団と個人　</a:t>
+            </a:r>
+            <a:r>
+              <a:rPr sz="2200" b="0" lang="ja-JP">
+                <a:solidFill>
+                  <a:srgbClr val="1A1A1A"/>
+                </a:solidFill>
+                <a:latin typeface="Noto Sans JP"/>
+                <a:ea typeface="Noto Sans JP"/>
+              </a:rPr>
+              <a:t>集団で当てはまる数字が、個人にも当てはまるとは限らないこと</a:t>
             </a:r>
           </a:p>
           <a:p>
@@ -11495,14 +11646,24 @@
               <a:buChar char="•"/>
             </a:pPr>
             <a:r>
-              <a:rPr sz="2200" b="0" lang="ja-JP">
+              <a:rPr sz="2200" b="1" lang="ja-JP">
                 <a:solidFill>
                   <a:srgbClr val="1A1A1A"/>
                 </a:solidFill>
                 <a:latin typeface="Noto Sans JP"/>
                 <a:ea typeface="Noto Sans JP"/>
               </a:rPr>
-              <a:t>割合を分ける推定には、経験的な裏づけが乏しい</a:t>
+              <a:t>推定の根拠　</a:t>
+            </a:r>
+            <a:r>
+              <a:rPr sz="2200" b="0" lang="ja-JP">
+                <a:solidFill>
+                  <a:srgbClr val="1A1A1A"/>
+                </a:solidFill>
+                <a:latin typeface="Noto Sans JP"/>
+                <a:ea typeface="Noto Sans JP"/>
+              </a:rPr>
+              <a:t>割合を分ける推定への、経験的な裏づけの乏しさ</a:t>
             </a:r>
           </a:p>
           <a:p>
@@ -11523,14 +11684,24 @@
               <a:buChar char="•"/>
             </a:pPr>
             <a:r>
-              <a:rPr sz="2200" b="0" lang="ja-JP">
+              <a:rPr sz="2200" b="1" lang="ja-JP">
                 <a:solidFill>
                   <a:srgbClr val="1A1A1A"/>
                 </a:solidFill>
                 <a:latin typeface="Noto Sans JP"/>
                 <a:ea typeface="Noto Sans JP"/>
               </a:rPr>
-              <a:t>「残りの40%」には、測定の誤差が含まれうる。すべてが意図的な活動の分とは言えない</a:t>
+              <a:t>「残りの40%」　</a:t>
+            </a:r>
+            <a:r>
+              <a:rPr sz="2200" b="0" lang="ja-JP">
+                <a:solidFill>
+                  <a:srgbClr val="1A1A1A"/>
+                </a:solidFill>
+                <a:latin typeface="Noto Sans JP"/>
+                <a:ea typeface="Noto Sans JP"/>
+              </a:rPr>
+              <a:t>測定の誤差を含みうるため、すべてを意図的な活動の分とは言えないこと</a:t>
             </a:r>
           </a:p>
           <a:p>
@@ -11551,14 +11722,24 @@
               <a:buChar char="•"/>
             </a:pPr>
             <a:r>
-              <a:rPr sz="2200" b="0" lang="ja-JP">
+              <a:rPr sz="2200" b="1" lang="ja-JP">
                 <a:solidFill>
                   <a:srgbClr val="1A1A1A"/>
                 </a:solidFill>
                 <a:latin typeface="Noto Sans JP"/>
                 <a:ea typeface="Noto Sans JP"/>
               </a:rPr>
-              <a:t>要因が足し合わさるという前提（加算性）も疑わしい</a:t>
+              <a:t>加算性　</a:t>
+            </a:r>
+            <a:r>
+              <a:rPr sz="2200" b="0" lang="ja-JP">
+                <a:solidFill>
+                  <a:srgbClr val="1A1A1A"/>
+                </a:solidFill>
+                <a:latin typeface="Noto Sans JP"/>
+                <a:ea typeface="Noto Sans JP"/>
+              </a:rPr>
+              <a:t>要因が足し合わさるという前提への疑義</a:t>
             </a:r>
           </a:p>
         </p:txBody>
@@ -11803,7 +11984,7 @@
                 <a:latin typeface="Noto Sans JP"/>
                 <a:ea typeface="Noto Sans JP"/>
               </a:rPr>
-              <a:t>7頁の暫定の読みを見直す。生まれの影響が見えることと、変えられないことは、別である。</a:t>
+              <a:t>前に出した「ここまでの結論（暫定）」を見直す。生まれの影響が見えることと、変えられないことは、別である。</a:t>
             </a:r>
           </a:p>
         </p:txBody>
@@ -11911,7 +12092,7 @@
       </p:sp>
       <p:graphicFrame>
         <p:nvGraphicFramePr>
-          <p:cNvPr id="4" name="表" descr="データが支えること、支えないことの表"/>
+          <p:cNvPr id="4" name="表" descr="データが支えることと支えないことの表"/>
           <p:cNvGraphicFramePr>
             <a:graphicFrameLocks noGrp="1"/>
           </p:cNvGraphicFramePr>
@@ -12274,7 +12455,7 @@
         <p:spPr>
           <a:xfrm>
             <a:off x="609600" y="3848100"/>
-            <a:ext cx="10972800" cy="1257300"/>
+            <a:ext cx="10972800" cy="838200"/>
           </a:xfrm>
           <a:prstGeom prst="rect">
             <a:avLst/>
@@ -12306,7 +12487,53 @@
                 <a:latin typeface="Noto Sans JP"/>
                 <a:ea typeface="Noto Sans JP"/>
               </a:rPr>
-              <a:t>データが示すのは、幸福感が動きにくい傾向と、個人差に遺伝が関わることまでである。幸福（価値ある活動を営むこと）が動かしにくいとまでは言えず、どこまで変えられるかも、このデータだけでは決まらない。</a:t>
+              <a:t>データが示すのは、幸福感が動きにくい傾向と、個人差に遺伝が関わることまでである。</a:t>
+            </a:r>
+          </a:p>
+        </p:txBody>
+      </p:sp>
+      <p:sp>
+        <p:nvSpPr>
+          <p:cNvPr id="6" name="TextBox 5"/>
+          <p:cNvSpPr txBox="1"/>
+          <p:nvPr/>
+        </p:nvSpPr>
+        <p:spPr>
+          <a:xfrm>
+            <a:off x="609600" y="4762500"/>
+            <a:ext cx="10972800" cy="838200"/>
+          </a:xfrm>
+          <a:prstGeom prst="rect">
+            <a:avLst/>
+          </a:prstGeom>
+          <a:noFill/>
+        </p:spPr>
+        <p:txBody>
+          <a:bodyPr wrap="square" lIns="0" rIns="0" tIns="0" bIns="0" anchor="t">
+            <a:noAutofit/>
+          </a:bodyPr>
+          <a:lstStyle/>
+          <a:p>
+            <a:pPr algn="l">
+              <a:lnSpc>
+                <a:spcPts val="3300"/>
+              </a:lnSpc>
+              <a:spcBef>
+                <a:spcPts val="0"/>
+              </a:spcBef>
+              <a:spcAft>
+                <a:spcPts val="0"/>
+              </a:spcAft>
+            </a:pPr>
+            <a:r>
+              <a:rPr sz="2200" b="0" lang="ja-JP">
+                <a:solidFill>
+                  <a:srgbClr val="1A1A1A"/>
+                </a:solidFill>
+                <a:latin typeface="Noto Sans JP"/>
+                <a:ea typeface="Noto Sans JP"/>
+              </a:rPr>
+              <a:t>幸福（価値ある活動を営むこと）が動かしにくいとまでは言えず、どこまで変えられるかも、このデータだけでは決まらない。</a:t>
             </a:r>
           </a:p>
         </p:txBody>
@@ -13160,7 +13387,7 @@
         </p:nvGraphicFramePr>
         <p:xfrm>
           <a:off x="609600" y="1676400"/>
-          <a:ext cx="10972800" cy="2133600"/>
+          <a:ext cx="10972800" cy="2819400"/>
         </p:xfrm>
         <a:graphic>
           <a:graphicData uri="http://schemas.openxmlformats.org/drawingml/2006/table">
@@ -13501,7 +13728,7 @@
                   </a:tcPr>
                 </a:tc>
               </a:tr>
-              <a:tr h="533400">
+              <a:tr h="1219200">
                 <a:tc>
                   <a:txBody>
                     <a:bodyPr wrap="square"/>
@@ -13634,7 +13861,7 @@
                           <a:latin typeface="Noto Sans JP"/>
                           <a:ea typeface="Noto Sans JP"/>
                         </a:rPr>
-                        <a:t>幸福感が、あとから伴う</a:t>
+                        <a:t>幸福感が、あとから伴う（前回の定義からの読み。この回のデータが示したものではない）</a:t>
                       </a:r>
                     </a:p>
                   </a:txBody>
@@ -14136,7 +14363,7 @@
                           <a:latin typeface="Noto Sans JP"/>
                           <a:ea typeface="Noto Sans JP"/>
                         </a:rPr>
-                        <a:t>主に効く先</a:t>
+                        <a:t>主に影響する先</a:t>
                       </a:r>
                     </a:p>
                   </a:txBody>
@@ -15733,14 +15960,14 @@
                 <a:latin typeface="Noto Sans JP"/>
                 <a:ea typeface="Noto Sans JP"/>
               </a:rPr>
-              <a:t>まとめ　変えられる幸福と変えられない幸福</a:t>
+              <a:t>まとめ　変えられるところ、変えられないところ</a:t>
             </a:r>
           </a:p>
         </p:txBody>
       </p:sp>
       <p:graphicFrame>
         <p:nvGraphicFramePr>
-          <p:cNvPr id="4" name="表" descr="まとめ　変えられる幸福と変えられない幸福の表"/>
+          <p:cNvPr id="4" name="表" descr="まとめ　変えられるところ、変えられないところの表"/>
           <p:cNvGraphicFramePr>
             <a:graphicFrameLocks noGrp="1"/>
           </p:cNvGraphicFramePr>
@@ -15748,7 +15975,7 @@
         </p:nvGraphicFramePr>
         <p:xfrm>
           <a:off x="609600" y="1676400"/>
-          <a:ext cx="10972800" cy="2971800"/>
+          <a:ext cx="10972800" cy="2286000"/>
         </p:xfrm>
         <a:graphic>
           <a:graphicData uri="http://schemas.openxmlformats.org/drawingml/2006/table">
@@ -15925,7 +16152,7 @@
                   </a:tcPr>
                 </a:tc>
               </a:tr>
-              <a:tr h="1562100">
+              <a:tr h="876300">
                 <a:tc>
                   <a:txBody>
                     <a:bodyPr wrap="square"/>
@@ -16004,7 +16231,7 @@
                           <a:latin typeface="Noto Sans JP"/>
                           <a:ea typeface="Noto Sans JP"/>
                         </a:rPr>
-                        <a:t>動きにくい傾向がある。ただし、遺伝率は、変えられなさを意味しない。直接追うと、外れやすい</a:t>
+                        <a:t>直接は追わず、活動を整えて、あとから伴わせる</a:t>
                       </a:r>
                     </a:p>
                   </a:txBody>
@@ -16265,7 +16492,7 @@
         </p:nvSpPr>
         <p:spPr>
           <a:xfrm>
-            <a:off x="609600" y="4876800"/>
+            <a:off x="609600" y="4191000"/>
             <a:ext cx="10972800" cy="838200"/>
           </a:xfrm>
           <a:prstGeom prst="rect">
@@ -16298,7 +16525,7 @@
                 <a:latin typeface="Noto Sans JP"/>
                 <a:ea typeface="Noto Sans JP"/>
               </a:rPr>
-              <a:t>この回の答えは、ソクラテスとストア派に近い。外から壊されるところが残るなら、それで足りるのか。次回に問う。</a:t>
+              <a:t>遺伝率は、変えられなさを意味しない。この回の答えは、ソクラテスとストア派に近い。外から壊されるところが残るなら、それで足りるのか。次回に問う。</a:t>
             </a:r>
           </a:p>
         </p:txBody>
@@ -17146,7 +17373,7 @@
         <p:spPr>
           <a:xfrm>
             <a:off x="1143000" y="2819400"/>
-            <a:ext cx="10439400" cy="457200"/>
+            <a:ext cx="10439400" cy="914400"/>
           </a:xfrm>
           <a:prstGeom prst="rect">
             <a:avLst/>
@@ -17178,7 +17405,7 @@
                 <a:latin typeface="Noto Sans JP"/>
                 <a:ea typeface="Noto Sans JP"/>
               </a:rPr>
-              <a:t>前回の三つの条件に照らして、自分で整えられる部分を書く</a:t>
+              <a:t>前回の三つの条件（①実際に行えているか、②本人が価値を認めているか、③実際に価値があるか）に照らして、自分で整えられる部分を書く</a:t>
             </a:r>
           </a:p>
         </p:txBody>
@@ -17292,8 +17519,8 @@
         </p:nvSpPr>
         <p:spPr>
           <a:xfrm>
-            <a:off x="609600" y="1524000"/>
-            <a:ext cx="10972800" cy="4349750"/>
+            <a:off x="609600" y="1447800"/>
+            <a:ext cx="5257800" cy="4565650"/>
           </a:xfrm>
           <a:prstGeom prst="rect">
             <a:avLst/>
@@ -17306,7 +17533,7 @@
           </a:bodyPr>
           <a:lstStyle/>
           <a:p>
-            <a:pPr algn="l" marL="190500" indent="-190500">
+            <a:pPr algn="l" marL="171450" indent="-171450">
               <a:lnSpc>
                 <a:spcPts val="1750"/>
               </a:lnSpc>
@@ -17330,11 +17557,11 @@
                 <a:latin typeface="Noto Sans JP"/>
                 <a:ea typeface="Noto Sans JP"/>
               </a:rPr>
-              <a:t>Seligman, M. E. P., &amp; Csikszentmihalyi, M. (2000). Positive psychology: An introduction. American Psychologist, 55(1).</a:t>
-            </a:r>
-          </a:p>
-          <a:p>
-            <a:pPr algn="l" marL="190500" indent="-190500">
+              <a:t>Seligman, M. E. P., &amp; Csikszentmihalyi, M. (2000). Positive psychology: An introduction. American Psychologist, 55(1), 5–14.</a:t>
+            </a:r>
+          </a:p>
+          <a:p>
+            <a:pPr algn="l" marL="171450" indent="-171450">
               <a:lnSpc>
                 <a:spcPts val="1750"/>
               </a:lnSpc>
@@ -17358,11 +17585,11 @@
                 <a:latin typeface="Noto Sans JP"/>
                 <a:ea typeface="Noto Sans JP"/>
               </a:rPr>
-              <a:t>Brickman, P., &amp; Campbell, D. T. (1971). Hedonic relativism and planning the good society.</a:t>
-            </a:r>
-          </a:p>
-          <a:p>
-            <a:pPr algn="l" marL="190500" indent="-190500">
+              <a:t>Brickman, P., &amp; Campbell, D. T. (1971). Hedonic relativism and planning the good society. In M. H. Appley (Ed.), Adaptation-level theory. Academic Press.</a:t>
+            </a:r>
+          </a:p>
+          <a:p>
+            <a:pPr algn="l" marL="171450" indent="-171450">
               <a:lnSpc>
                 <a:spcPts val="1750"/>
               </a:lnSpc>
@@ -17386,11 +17613,11 @@
                 <a:latin typeface="Noto Sans JP"/>
                 <a:ea typeface="Noto Sans JP"/>
               </a:rPr>
-              <a:t>Brickman, P., Coates, D., &amp; Janoff-Bulman, R. (1978). Lottery winners and accident victims: Is happiness relative? Journal of Personality and Social Psychology, 36(8).</a:t>
-            </a:r>
-          </a:p>
-          <a:p>
-            <a:pPr algn="l" marL="190500" indent="-190500">
+              <a:t>Brickman, P., Coates, D., &amp; Janoff-Bulman, R. (1978). Lottery winners and accident victims: Is happiness relative? Journal of Personality and Social Psychology, 36(8), 917–927.</a:t>
+            </a:r>
+          </a:p>
+          <a:p>
+            <a:pPr algn="l" marL="171450" indent="-171450">
               <a:lnSpc>
                 <a:spcPts val="1750"/>
               </a:lnSpc>
@@ -17418,7 +17645,7 @@
             </a:r>
           </a:p>
           <a:p>
-            <a:pPr algn="l" marL="190500" indent="-190500">
+            <a:pPr algn="l" marL="171450" indent="-171450">
               <a:lnSpc>
                 <a:spcPts val="1750"/>
               </a:lnSpc>
@@ -17446,7 +17673,7 @@
             </a:r>
           </a:p>
           <a:p>
-            <a:pPr algn="l" marL="190500" indent="-190500">
+            <a:pPr algn="l" marL="171450" indent="-171450">
               <a:lnSpc>
                 <a:spcPts val="1750"/>
               </a:lnSpc>
@@ -17470,11 +17697,34 @@
                 <a:latin typeface="Noto Sans JP"/>
                 <a:ea typeface="Noto Sans JP"/>
               </a:rPr>
-              <a:t>Lyubomirsky, S., Sheldon, K. M., &amp; Schkade, D. (2005). Pursuing happiness: The architecture of sustainable change. Review of General Psychology.</a:t>
-            </a:r>
-          </a:p>
-          <a:p>
-            <a:pPr algn="l" marL="190500" indent="-190500">
+              <a:t>Lyubomirsky, S., Sheldon, K. M., &amp; Schkade, D. (2005). Pursuing happiness: The architecture of sustainable change. Review of General Psychology, 9(2), 111–131.</a:t>
+            </a:r>
+          </a:p>
+        </p:txBody>
+      </p:sp>
+      <p:sp>
+        <p:nvSpPr>
+          <p:cNvPr id="5" name="TextBox 4"/>
+          <p:cNvSpPr txBox="1"/>
+          <p:nvPr/>
+        </p:nvSpPr>
+        <p:spPr>
+          <a:xfrm>
+            <a:off x="6324600" y="1447800"/>
+            <a:ext cx="5257800" cy="4121150"/>
+          </a:xfrm>
+          <a:prstGeom prst="rect">
+            <a:avLst/>
+          </a:prstGeom>
+          <a:noFill/>
+        </p:spPr>
+        <p:txBody>
+          <a:bodyPr wrap="square" lIns="0" rIns="0" tIns="0" bIns="0" anchor="t">
+            <a:noAutofit/>
+          </a:bodyPr>
+          <a:lstStyle/>
+          <a:p>
+            <a:pPr algn="l" marL="171450" indent="-171450">
               <a:lnSpc>
                 <a:spcPts val="1750"/>
               </a:lnSpc>
@@ -17498,11 +17748,11 @@
                 <a:latin typeface="Noto Sans JP"/>
                 <a:ea typeface="Noto Sans JP"/>
               </a:rPr>
-              <a:t>Brown, N. J. L., &amp; Rohrer, J. M. (2020). Easy as (happiness) pie? A critical evaluation of a popular model of the determinants of well-being. Journal of Happiness Studies.</a:t>
-            </a:r>
-          </a:p>
-          <a:p>
-            <a:pPr algn="l" marL="190500" indent="-190500">
+              <a:t>Brown, N. J. L., &amp; Rohrer, J. M. (2020). Easy as (happiness) pie? A critical evaluation of a popular model of the determinants of well-being. Journal of Happiness Studies, 21(4).</a:t>
+            </a:r>
+          </a:p>
+          <a:p>
+            <a:pPr algn="l" marL="171450" indent="-171450">
               <a:lnSpc>
                 <a:spcPts val="1750"/>
               </a:lnSpc>
@@ -17526,11 +17776,11 @@
                 <a:latin typeface="Noto Sans JP"/>
                 <a:ea typeface="Noto Sans JP"/>
               </a:rPr>
-              <a:t>Mauss, I. B., Tamir, M., Anderson, C. L., &amp; Savino, N. S. (2011). Can seeking happiness make people unhappy? Paradoxical effects of valuing happiness. Emotion.</a:t>
-            </a:r>
-          </a:p>
-          <a:p>
-            <a:pPr algn="l" marL="190500" indent="-190500">
+              <a:t>Mauss, I. B., Tamir, M., Anderson, C. L., &amp; Savino, N. S. (2011). Can seeking happiness make people unhappy? Paradoxical effects of valuing happiness. Emotion, 11(4), 807–815.</a:t>
+            </a:r>
+          </a:p>
+          <a:p>
+            <a:pPr algn="l" marL="171450" indent="-171450">
               <a:lnSpc>
                 <a:spcPts val="1750"/>
               </a:lnSpc>
@@ -17554,11 +17804,11 @@
                 <a:latin typeface="Noto Sans JP"/>
                 <a:ea typeface="Noto Sans JP"/>
               </a:rPr>
-              <a:t>Diener, E., Emmons, R. A., Larsen, R. J., &amp; Griffin, S. (1985). The Satisfaction With Life Scale. Journal of Personality Assessment.</a:t>
-            </a:r>
-          </a:p>
-          <a:p>
-            <a:pPr algn="l" marL="190500" indent="-190500">
+              <a:t>Diener, E., Emmons, R. A., Larsen, R. J., &amp; Griffin, S. (1985). The Satisfaction With Life Scale. Journal of Personality Assessment, 49(1), 71–75.</a:t>
+            </a:r>
+          </a:p>
+          <a:p>
+            <a:pPr algn="l" marL="171450" indent="-171450">
               <a:lnSpc>
                 <a:spcPts val="1750"/>
               </a:lnSpc>
@@ -17582,20 +17832,76 @@
                 <a:latin typeface="Noto Sans JP"/>
                 <a:ea typeface="Noto Sans JP"/>
               </a:rPr>
-              <a:t>プラトン『エウテュデモス』278e–282a、エピクテトス『提要』第1節</a:t>
-            </a:r>
-          </a:p>
-        </p:txBody>
-      </p:sp>
-      <p:sp>
-        <p:nvSpPr>
-          <p:cNvPr id="5" name="TextBox 4"/>
+              <a:t>Ellis, A. (1962). Reason and emotion in psychotherapy. Lyle Stuart.</a:t>
+            </a:r>
+          </a:p>
+          <a:p>
+            <a:pPr algn="l" marL="171450" indent="-171450">
+              <a:lnSpc>
+                <a:spcPts val="1750"/>
+              </a:lnSpc>
+              <a:spcBef>
+                <a:spcPts val="0"/>
+              </a:spcBef>
+              <a:spcAft>
+                <a:spcPts val="450"/>
+              </a:spcAft>
+              <a:buClr>
+                <a:srgbClr val="0017C1"/>
+              </a:buClr>
+              <a:buFont typeface="Arial"/>
+              <a:buChar char="•"/>
+            </a:pPr>
+            <a:r>
+              <a:rPr sz="1400" b="0" lang="ja-JP">
+                <a:solidFill>
+                  <a:srgbClr val="1A1A1A"/>
+                </a:solidFill>
+                <a:latin typeface="Noto Sans JP"/>
+                <a:ea typeface="Noto Sans JP"/>
+              </a:rPr>
+              <a:t>Beck, A. T. (1976). Cognitive therapy and the emotional disorders. International Universities Press.</a:t>
+            </a:r>
+          </a:p>
+          <a:p>
+            <a:pPr algn="l" marL="171450" indent="-171450">
+              <a:lnSpc>
+                <a:spcPts val="1750"/>
+              </a:lnSpc>
+              <a:spcBef>
+                <a:spcPts val="0"/>
+              </a:spcBef>
+              <a:spcAft>
+                <a:spcPts val="450"/>
+              </a:spcAft>
+              <a:buClr>
+                <a:srgbClr val="0017C1"/>
+              </a:buClr>
+              <a:buFont typeface="Arial"/>
+              <a:buChar char="•"/>
+            </a:pPr>
+            <a:r>
+              <a:rPr sz="1400" b="0" lang="ja-JP">
+                <a:solidFill>
+                  <a:srgbClr val="1A1A1A"/>
+                </a:solidFill>
+                <a:latin typeface="Noto Sans JP"/>
+                <a:ea typeface="Noto Sans JP"/>
+              </a:rPr>
+              <a:t>プラトン『エウテュデモス』278e–282a、エピクテトス『提要』第1節・第5節</a:t>
+            </a:r>
+          </a:p>
+        </p:txBody>
+      </p:sp>
+      <p:sp>
+        <p:nvSpPr>
+          <p:cNvPr id="6" name="TextBox 5"/>
           <p:cNvSpPr txBox="1"/>
           <p:nvPr/>
         </p:nvSpPr>
         <p:spPr>
           <a:xfrm>
-            <a:off x="609600" y="6096000"/>
+            <a:off x="609600" y="6362700"/>
             <a:ext cx="10972800" cy="231140"/>
           </a:xfrm>
           <a:prstGeom prst="rect">
@@ -17799,8 +18105,8 @@
         </p:nvCxnSpPr>
         <p:spPr>
           <a:xfrm>
-            <a:off x="1143000" y="3200400"/>
-            <a:ext cx="0" cy="2895600"/>
+            <a:off x="1143000" y="3124200"/>
+            <a:ext cx="0" cy="2705100"/>
           </a:xfrm>
           <a:prstGeom prst="line">
             <a:avLst/>
@@ -17820,7 +18126,7 @@
         </p:nvCxnSpPr>
         <p:spPr>
           <a:xfrm>
-            <a:off x="1143000" y="6096000"/>
+            <a:off x="1143000" y="5829300"/>
             <a:ext cx="10191750" cy="0"/>
           </a:xfrm>
           <a:prstGeom prst="line">
@@ -17842,7 +18148,7 @@
         </p:nvCxnSpPr>
         <p:spPr>
           <a:xfrm>
-            <a:off x="1143000" y="4648200"/>
+            <a:off x="1143000" y="4476750"/>
             <a:ext cx="10191750" cy="0"/>
           </a:xfrm>
           <a:prstGeom prst="line">
@@ -17864,7 +18170,7 @@
         </p:nvSpPr>
         <p:spPr>
           <a:xfrm>
-            <a:off x="1257300" y="3162300"/>
+            <a:off x="1257300" y="3086100"/>
             <a:ext cx="1143000" cy="243840"/>
           </a:xfrm>
           <a:prstGeom prst="rect">
@@ -17910,7 +18216,7 @@
         </p:nvSpPr>
         <p:spPr>
           <a:xfrm>
-            <a:off x="10763250" y="5829300"/>
+            <a:off x="10763250" y="5562600"/>
             <a:ext cx="666750" cy="243840"/>
           </a:xfrm>
           <a:prstGeom prst="rect">
@@ -17956,7 +18262,7 @@
         </p:nvSpPr>
         <p:spPr>
           <a:xfrm>
-            <a:off x="9525000" y="4381500"/>
+            <a:off x="9525000" y="4210050"/>
             <a:ext cx="1809750" cy="243840"/>
           </a:xfrm>
           <a:prstGeom prst="rect">
@@ -18002,8 +18308,8 @@
         </p:nvSpPr>
         <p:spPr>
           <a:xfrm>
-            <a:off x="1333500" y="3543300"/>
-            <a:ext cx="4914900" cy="1104900"/>
+            <a:off x="1333500" y="3467100"/>
+            <a:ext cx="4914900" cy="1009650"/>
           </a:xfrm>
           <a:custGeom>
             <a:avLst/>
@@ -18012,90 +18318,90 @@
             <a:cxnLst/>
             <a:rect l="l" t="t" r="r" b="b"/>
             <a:pathLst>
-              <a:path w="4914900" h="1104900">
+              <a:path w="4914900" h="1009650">
                 <a:moveTo>
-                  <a:pt x="0" y="1104900"/>
+                  <a:pt x="0" y="1009650"/>
                 </a:moveTo>
                 <a:lnTo>
-                  <a:pt x="1524000" y="1104900"/>
+                  <a:pt x="1524000" y="1009650"/>
                 </a:lnTo>
                 <a:lnTo>
                   <a:pt x="1581150" y="0"/>
                 </a:lnTo>
                 <a:lnTo>
-                  <a:pt x="1714500" y="172735"/>
+                  <a:pt x="1714500" y="157844"/>
                 </a:lnTo>
                 <a:lnTo>
-                  <a:pt x="1847850" y="318465"/>
+                  <a:pt x="1847850" y="291011"/>
                 </a:lnTo>
                 <a:lnTo>
-                  <a:pt x="1981200" y="441412"/>
+                  <a:pt x="1981200" y="403360"/>
                 </a:lnTo>
                 <a:lnTo>
-                  <a:pt x="2114550" y="545139"/>
+                  <a:pt x="2114550" y="498144"/>
                 </a:lnTo>
                 <a:lnTo>
-                  <a:pt x="2247900" y="632649"/>
+                  <a:pt x="2247900" y="578111"/>
                 </a:lnTo>
                 <a:lnTo>
-                  <a:pt x="2381250" y="706479"/>
+                  <a:pt x="2381250" y="645575"/>
                 </a:lnTo>
                 <a:lnTo>
-                  <a:pt x="2514600" y="768766"/>
+                  <a:pt x="2514600" y="702493"/>
                 </a:lnTo>
                 <a:lnTo>
-                  <a:pt x="2647950" y="821316"/>
+                  <a:pt x="2647950" y="750512"/>
                 </a:lnTo>
                 <a:lnTo>
-                  <a:pt x="2781300" y="865650"/>
+                  <a:pt x="2781300" y="791025"/>
                 </a:lnTo>
                 <a:lnTo>
-                  <a:pt x="2914650" y="903053"/>
+                  <a:pt x="2914650" y="825204"/>
                 </a:lnTo>
                 <a:lnTo>
-                  <a:pt x="3048000" y="934609"/>
+                  <a:pt x="3048000" y="854039"/>
                 </a:lnTo>
                 <a:lnTo>
-                  <a:pt x="3181350" y="961231"/>
+                  <a:pt x="3181350" y="878367"/>
                 </a:lnTo>
                 <a:lnTo>
-                  <a:pt x="3314700" y="983692"/>
+                  <a:pt x="3314700" y="898891"/>
                 </a:lnTo>
                 <a:lnTo>
-                  <a:pt x="3448050" y="1002641"/>
+                  <a:pt x="3448050" y="916206"/>
                 </a:lnTo>
                 <a:lnTo>
-                  <a:pt x="3581400" y="1018628"/>
+                  <a:pt x="3581400" y="930815"/>
                 </a:lnTo>
                 <a:lnTo>
-                  <a:pt x="3714750" y="1032115"/>
+                  <a:pt x="3714750" y="943140"/>
                 </a:lnTo>
                 <a:lnTo>
-                  <a:pt x="3848100" y="1043494"/>
+                  <a:pt x="3848100" y="953537"/>
                 </a:lnTo>
                 <a:lnTo>
-                  <a:pt x="3981450" y="1053094"/>
+                  <a:pt x="3981450" y="962310"/>
                 </a:lnTo>
                 <a:lnTo>
-                  <a:pt x="4114800" y="1061193"/>
+                  <a:pt x="4114800" y="969711"/>
                 </a:lnTo>
                 <a:lnTo>
-                  <a:pt x="4248150" y="1068026"/>
+                  <a:pt x="4248150" y="975955"/>
                 </a:lnTo>
                 <a:lnTo>
-                  <a:pt x="4381500" y="1073791"/>
+                  <a:pt x="4381500" y="981222"/>
                 </a:lnTo>
                 <a:lnTo>
-                  <a:pt x="4514850" y="1078654"/>
+                  <a:pt x="4514850" y="985667"/>
                 </a:lnTo>
                 <a:lnTo>
-                  <a:pt x="4648200" y="1082757"/>
+                  <a:pt x="4648200" y="989416"/>
                 </a:lnTo>
                 <a:lnTo>
-                  <a:pt x="4781550" y="1086219"/>
+                  <a:pt x="4781550" y="992579"/>
                 </a:lnTo>
                 <a:lnTo>
-                  <a:pt x="4914900" y="1104900"/>
+                  <a:pt x="4914900" y="1009650"/>
                 </a:lnTo>
               </a:path>
             </a:pathLst>
@@ -18123,7 +18429,7 @@
         </p:nvSpPr>
         <p:spPr>
           <a:xfrm>
-            <a:off x="3105150" y="3219450"/>
+            <a:off x="3105150" y="3143250"/>
             <a:ext cx="3143250" cy="274320"/>
           </a:xfrm>
           <a:prstGeom prst="rect">
@@ -18169,8 +18475,8 @@
         </p:nvSpPr>
         <p:spPr>
           <a:xfrm>
-            <a:off x="6667500" y="4648200"/>
-            <a:ext cx="3771900" cy="1104900"/>
+            <a:off x="6667500" y="4476750"/>
+            <a:ext cx="3771900" cy="1009650"/>
           </a:xfrm>
           <a:custGeom>
             <a:avLst/>
@@ -18179,7 +18485,7 @@
             <a:cxnLst/>
             <a:rect l="l" t="t" r="r" b="b"/>
             <a:pathLst>
-              <a:path w="3771900" h="1104900">
+              <a:path w="3771900" h="1009650">
                 <a:moveTo>
                   <a:pt x="0" y="0"/>
                 </a:moveTo>
@@ -18187,79 +18493,79 @@
                   <a:pt x="381000" y="0"/>
                 </a:lnTo>
                 <a:lnTo>
-                  <a:pt x="438150" y="1104900"/>
+                  <a:pt x="438150" y="1009650"/>
                 </a:lnTo>
                 <a:lnTo>
-                  <a:pt x="571500" y="932165"/>
+                  <a:pt x="571500" y="851806"/>
                 </a:lnTo>
                 <a:lnTo>
-                  <a:pt x="704850" y="786435"/>
+                  <a:pt x="704850" y="718639"/>
                 </a:lnTo>
                 <a:lnTo>
-                  <a:pt x="838200" y="663488"/>
+                  <a:pt x="838200" y="606290"/>
                 </a:lnTo>
                 <a:lnTo>
-                  <a:pt x="971550" y="559761"/>
+                  <a:pt x="971550" y="511506"/>
                 </a:lnTo>
                 <a:lnTo>
-                  <a:pt x="1104900" y="472251"/>
+                  <a:pt x="1104900" y="431539"/>
                 </a:lnTo>
                 <a:lnTo>
-                  <a:pt x="1238250" y="398421"/>
+                  <a:pt x="1238250" y="364075"/>
                 </a:lnTo>
                 <a:lnTo>
-                  <a:pt x="1371600" y="336134"/>
+                  <a:pt x="1371600" y="307157"/>
                 </a:lnTo>
                 <a:lnTo>
-                  <a:pt x="1504950" y="283584"/>
+                  <a:pt x="1504950" y="259138"/>
                 </a:lnTo>
                 <a:lnTo>
-                  <a:pt x="1638300" y="239250"/>
+                  <a:pt x="1638300" y="218625"/>
                 </a:lnTo>
                 <a:lnTo>
-                  <a:pt x="1771650" y="201847"/>
+                  <a:pt x="1771650" y="184446"/>
                 </a:lnTo>
                 <a:lnTo>
-                  <a:pt x="1905000" y="170291"/>
+                  <a:pt x="1905000" y="155611"/>
                 </a:lnTo>
                 <a:lnTo>
-                  <a:pt x="2038350" y="143669"/>
+                  <a:pt x="2038350" y="131283"/>
                 </a:lnTo>
                 <a:lnTo>
-                  <a:pt x="2171700" y="121208"/>
+                  <a:pt x="2171700" y="110759"/>
                 </a:lnTo>
                 <a:lnTo>
-                  <a:pt x="2305050" y="102259"/>
+                  <a:pt x="2305050" y="93444"/>
                 </a:lnTo>
                 <a:lnTo>
-                  <a:pt x="2438400" y="86272"/>
+                  <a:pt x="2438400" y="78835"/>
                 </a:lnTo>
                 <a:lnTo>
-                  <a:pt x="2571750" y="72785"/>
+                  <a:pt x="2571750" y="66510"/>
                 </a:lnTo>
                 <a:lnTo>
-                  <a:pt x="2705100" y="61406"/>
+                  <a:pt x="2705100" y="56113"/>
                 </a:lnTo>
                 <a:lnTo>
-                  <a:pt x="2838450" y="51806"/>
+                  <a:pt x="2838450" y="47340"/>
                 </a:lnTo>
                 <a:lnTo>
-                  <a:pt x="2971800" y="43707"/>
+                  <a:pt x="2971800" y="39939"/>
                 </a:lnTo>
                 <a:lnTo>
-                  <a:pt x="3105150" y="36874"/>
+                  <a:pt x="3105150" y="33695"/>
                 </a:lnTo>
                 <a:lnTo>
-                  <a:pt x="3238500" y="31109"/>
+                  <a:pt x="3238500" y="28428"/>
                 </a:lnTo>
                 <a:lnTo>
-                  <a:pt x="3371850" y="26246"/>
+                  <a:pt x="3371850" y="23983"/>
                 </a:lnTo>
                 <a:lnTo>
-                  <a:pt x="3505200" y="22143"/>
+                  <a:pt x="3505200" y="20234"/>
                 </a:lnTo>
                 <a:lnTo>
-                  <a:pt x="3638550" y="18681"/>
+                  <a:pt x="3638550" y="17071"/>
                 </a:lnTo>
                 <a:lnTo>
                   <a:pt x="3771900" y="0"/>
@@ -18290,7 +18596,7 @@
         </p:nvSpPr>
         <p:spPr>
           <a:xfrm>
-            <a:off x="7296150" y="5695950"/>
+            <a:off x="7296150" y="5429250"/>
             <a:ext cx="3143250" cy="274320"/>
           </a:xfrm>
           <a:prstGeom prst="rect">
@@ -18336,8 +18642,8 @@
         </p:nvCxnSpPr>
         <p:spPr>
           <a:xfrm>
-            <a:off x="2857500" y="3276600"/>
-            <a:ext cx="0" cy="2819400"/>
+            <a:off x="2857500" y="3200400"/>
+            <a:ext cx="0" cy="2628900"/>
           </a:xfrm>
           <a:prstGeom prst="line">
             <a:avLst/>
@@ -18358,8 +18664,8 @@
         </p:nvCxnSpPr>
         <p:spPr>
           <a:xfrm>
-            <a:off x="7048500" y="3276600"/>
-            <a:ext cx="0" cy="2819400"/>
+            <a:off x="7048500" y="3200400"/>
+            <a:ext cx="0" cy="2628900"/>
           </a:xfrm>
           <a:prstGeom prst="line">
             <a:avLst/>
@@ -18380,7 +18686,7 @@
         </p:nvSpPr>
         <p:spPr>
           <a:xfrm>
-            <a:off x="2476500" y="6134100"/>
+            <a:off x="2476500" y="5867400"/>
             <a:ext cx="1143000" cy="213360"/>
           </a:xfrm>
           <a:prstGeom prst="rect">
@@ -18426,7 +18732,7 @@
         </p:nvSpPr>
         <p:spPr>
           <a:xfrm>
-            <a:off x="6667500" y="6134100"/>
+            <a:off x="6667500" y="5867400"/>
             <a:ext cx="1143000" cy="213360"/>
           </a:xfrm>
           <a:prstGeom prst="rect">
@@ -18472,7 +18778,7 @@
         </p:nvSpPr>
         <p:spPr>
           <a:xfrm>
-            <a:off x="609600" y="6515100"/>
+            <a:off x="609600" y="6286500"/>
             <a:ext cx="10972800" cy="248920"/>
           </a:xfrm>
           <a:prstGeom prst="rect">
@@ -18877,7 +19183,7 @@
                           <a:latin typeface="Noto Sans JP"/>
                           <a:ea typeface="Noto Sans JP"/>
                         </a:rPr>
-                        <a:t>Brickman, Coates &amp; Janoff-Bulman。イリノイ州の宝くじの高額当選者と、事故で麻痺した人を、比較群と比べた</a:t>
+                        <a:t>Brickman, Coates &amp; Janoff-Bulman。イリノイ州の宝くじの高額当選者を、比較群と比べた</a:t>
                       </a:r>
                     </a:p>
                   </a:txBody>
@@ -19331,7 +19637,7 @@
         </p:nvSpPr>
         <p:spPr>
           <a:xfrm>
-            <a:off x="609600" y="2705100"/>
+            <a:off x="609600" y="2857500"/>
             <a:ext cx="10972800" cy="330200"/>
           </a:xfrm>
           <a:prstGeom prst="rect">
@@ -19377,7 +19683,7 @@
         </p:nvSpPr>
         <p:spPr>
           <a:xfrm>
-            <a:off x="609600" y="3067050"/>
+            <a:off x="609600" y="3219450"/>
             <a:ext cx="400050" cy="419100"/>
           </a:xfrm>
           <a:prstGeom prst="rect">
@@ -19406,7 +19712,7 @@
         </p:nvSpPr>
         <p:spPr>
           <a:xfrm>
-            <a:off x="1162050" y="3105150"/>
+            <a:off x="1162050" y="3257550"/>
             <a:ext cx="2476500" cy="365760"/>
           </a:xfrm>
           <a:prstGeom prst="rect">
@@ -19452,7 +19758,7 @@
         </p:nvSpPr>
         <p:spPr>
           <a:xfrm>
-            <a:off x="609600" y="3695700"/>
+            <a:off x="609600" y="3848100"/>
             <a:ext cx="10972800" cy="330200"/>
           </a:xfrm>
           <a:prstGeom prst="rect">
@@ -19498,7 +19804,7 @@
         </p:nvSpPr>
         <p:spPr>
           <a:xfrm>
-            <a:off x="609600" y="4057650"/>
+            <a:off x="609600" y="4210050"/>
             <a:ext cx="5867400" cy="419100"/>
           </a:xfrm>
           <a:prstGeom prst="rect">
@@ -19527,7 +19833,7 @@
         </p:nvSpPr>
         <p:spPr>
           <a:xfrm>
-            <a:off x="6477000" y="4057650"/>
+            <a:off x="6477000" y="4210050"/>
             <a:ext cx="1066800" cy="419100"/>
           </a:xfrm>
           <a:prstGeom prst="rect">
@@ -19558,7 +19864,7 @@
         </p:nvSpPr>
         <p:spPr>
           <a:xfrm>
-            <a:off x="7696200" y="4095750"/>
+            <a:off x="7696200" y="4248150"/>
             <a:ext cx="2476500" cy="365760"/>
           </a:xfrm>
           <a:prstGeom prst="rect">
@@ -19604,7 +19910,7 @@
         </p:nvSpPr>
         <p:spPr>
           <a:xfrm>
-            <a:off x="609600" y="4610100"/>
+            <a:off x="609600" y="4762500"/>
             <a:ext cx="10972800" cy="248920"/>
           </a:xfrm>
           <a:prstGeom prst="rect">
@@ -19650,7 +19956,7 @@
         </p:nvSpPr>
         <p:spPr>
           <a:xfrm>
-            <a:off x="609600" y="4914900"/>
+            <a:off x="609600" y="5067300"/>
             <a:ext cx="10972800" cy="838200"/>
           </a:xfrm>
           <a:prstGeom prst="rect">
@@ -19684,6 +19990,62 @@
                 <a:ea typeface="Noto Sans JP"/>
               </a:rPr>
               <a:t>4.5年後と10年後に一部の標本で再測定すると、幸福感の安定した部分の遺伝率は約80%に近づいた。</a:t>
+            </a:r>
+          </a:p>
+        </p:txBody>
+      </p:sp>
+      <p:sp>
+        <p:nvSpPr>
+          <p:cNvPr id="14" name="TextBox 13"/>
+          <p:cNvSpPr txBox="1"/>
+          <p:nvPr/>
+        </p:nvSpPr>
+        <p:spPr>
+          <a:xfrm>
+            <a:off x="609600" y="6019800"/>
+            <a:ext cx="10972800" cy="320040"/>
+          </a:xfrm>
+          <a:prstGeom prst="rect">
+            <a:avLst/>
+          </a:prstGeom>
+          <a:noFill/>
+        </p:spPr>
+        <p:txBody>
+          <a:bodyPr wrap="square" lIns="0" rIns="0" tIns="0" bIns="0" anchor="t">
+            <a:noAutofit/>
+          </a:bodyPr>
+          <a:lstStyle/>
+          <a:p>
+            <a:pPr algn="l">
+              <a:lnSpc>
+                <a:spcPts val="2520"/>
+              </a:lnSpc>
+              <a:spcBef>
+                <a:spcPts val="0"/>
+              </a:spcBef>
+              <a:spcAft>
+                <a:spcPts val="0"/>
+              </a:spcAft>
+            </a:pPr>
+            <a:r>
+              <a:rPr sz="1800" b="1" lang="ja-JP">
+                <a:solidFill>
+                  <a:srgbClr val="1A1A1A"/>
+                </a:solidFill>
+                <a:latin typeface="Noto Sans JP"/>
+                <a:ea typeface="Noto Sans JP"/>
+              </a:rPr>
+              <a:t>遺伝率　</a:t>
+            </a:r>
+            <a:r>
+              <a:rPr sz="1800" b="0" lang="ja-JP">
+                <a:solidFill>
+                  <a:srgbClr val="1A1A1A"/>
+                </a:solidFill>
+                <a:latin typeface="Noto Sans JP"/>
+                <a:ea typeface="Noto Sans JP"/>
+              </a:rPr>
+              <a:t>集団の個人差のうち、遺伝の差で説明できる割合</a:t>
             </a:r>
           </a:p>
         </p:txBody>
@@ -20225,7 +20587,7 @@
                 <a:latin typeface="Noto Sans JP"/>
                 <a:ea typeface="Noto Sans JP"/>
               </a:rPr>
-              <a:t>暫定の読み。生まれの影響が見えることと、変えられないことは、別である。のちに見直す。</a:t>
+              <a:t>生まれの影響が見えることと、変えられないことは、別である。のちに見直す。</a:t>
             </a:r>
           </a:p>
         </p:txBody>
@@ -20683,7 +21045,7 @@
                 <a:latin typeface="Noto Sans JP"/>
                 <a:ea typeface="Noto Sans JP"/>
               </a:rPr>
-              <a:t>健康、富、権力。多くの人は、これらを善いものと考える</a:t>
+              <a:t>健康、富、権力　多くの人が善いと考えるもの</a:t>
             </a:r>
           </a:p>
           <a:p>
@@ -20711,7 +21073,7 @@
                 <a:latin typeface="Noto Sans JP"/>
                 <a:ea typeface="Noto Sans JP"/>
               </a:rPr>
-              <a:t>しかし、使い方を誤れば、これらは害にもなる</a:t>
+              <a:t>使い方を誤れば、害にもなるもの</a:t>
             </a:r>
           </a:p>
           <a:p>
@@ -20739,7 +21101,7 @@
                 <a:latin typeface="Noto Sans JP"/>
                 <a:ea typeface="Noto Sans JP"/>
               </a:rPr>
-              <a:t>では、正しく使わせるものは何か</a:t>
+              <a:t>問い　正しく使わせるものは何か</a:t>
             </a:r>
           </a:p>
         </p:txBody>

--- a/work/幸福_第2回/幸福_第2回.pptx
+++ b/work/幸福_第2回/幸福_第2回.pptx
@@ -777,7 +777,7 @@
           <a:lstStyle/>
           <a:p>
             <a:r>
-              <a:t>0分。冒頭に、前回の問い「自分次第か、運か」を思い出してもらう。この回の最後には答えを出さず、次回の末尾で再投票する。</a:t>
+              <a:t>0分。冒頭に、前回の問い「自分次第か、運か」を思い出してもらう。冒頭の問い（自分次第か、運か）には、この回で答えを出さず、次回の末尾で再投票する。</a:t>
             </a:r>
           </a:p>
         </p:txBody>
@@ -6053,7 +6053,7 @@
                 <a:latin typeface="Noto Sans JP"/>
                 <a:ea typeface="Noto Sans JP"/>
               </a:rPr>
-              <a:t>人間と哲学　第3回</a:t>
+              <a:t>人間と哲学　第3回（幸福　第2回）</a:t>
             </a:r>
           </a:p>
         </p:txBody>
@@ -6911,7 +6911,7 @@
         <p:spPr>
           <a:xfrm>
             <a:off x="838200" y="2209800"/>
-            <a:ext cx="3733800" cy="941070"/>
+            <a:ext cx="3733800" cy="1367790"/>
           </a:xfrm>
           <a:prstGeom prst="rect">
             <a:avLst/>
@@ -6943,7 +6943,7 @@
                 <a:latin typeface="Noto Sans JP"/>
                 <a:ea typeface="Noto Sans JP"/>
               </a:rPr>
-              <a:t>幸運（外から来る）</a:t>
+              <a:t>運に左右される善いもの（外から来る）</a:t>
             </a:r>
           </a:p>
           <a:p>
@@ -7425,7 +7425,7 @@
                 <a:latin typeface="Noto Sans JP"/>
                 <a:ea typeface="Noto Sans JP"/>
               </a:rPr>
-              <a:t>前のページ（プラトン『エウテュデモス』）の要旨を読み、置き換えの怪しい点を一つ書く。</a:t>
+              <a:t>先ほどのプラトン『エウテュデモス』の要旨を読み、置き換えの怪しい点を一つ書く。</a:t>
             </a:r>
           </a:p>
         </p:txBody>
@@ -8280,7 +8280,7 @@
         <p:spPr>
           <a:xfrm>
             <a:off x="609600" y="1752600"/>
-            <a:ext cx="6286500" cy="2800350"/>
+            <a:ext cx="6286500" cy="2343150"/>
           </a:xfrm>
           <a:prstGeom prst="rect">
             <a:avLst/>
@@ -8373,7 +8373,7 @@
                 <a:latin typeface="Noto Sans JP"/>
                 <a:ea typeface="Noto Sans JP"/>
               </a:rPr>
-              <a:t>講義を弟子が書き留めた。『提要』はその手引き</a:t>
+              <a:t>弟子が書き留めた講義録『提要』</a:t>
             </a:r>
           </a:p>
         </p:txBody>
@@ -8800,14 +8800,14 @@
       </p:sp>
       <p:sp>
         <p:nvSpPr>
-          <p:cNvPr id="4" name="自分次第（自分の行い）の面"/>
+          <p:cNvPr id="4" name="自分次第の面"/>
           <p:cNvSpPr/>
           <p:nvPr/>
         </p:nvSpPr>
         <p:spPr>
           <a:xfrm>
             <a:off x="609600" y="1752600"/>
-            <a:ext cx="5181600" cy="3482340"/>
+            <a:ext cx="5181600" cy="3340100"/>
           </a:xfrm>
           <a:prstGeom prst="rect">
             <a:avLst/>
@@ -8838,7 +8838,7 @@
         <p:spPr>
           <a:xfrm>
             <a:off x="914400" y="2019300"/>
-            <a:ext cx="4572000" cy="2522220"/>
+            <a:ext cx="4572000" cy="2806700"/>
           </a:xfrm>
           <a:prstGeom prst="rect">
             <a:avLst/>
@@ -8859,18 +8859,41 @@
                 <a:spcPts val="0"/>
               </a:spcBef>
               <a:spcAft>
+                <a:spcPts val="0"/>
+              </a:spcAft>
+            </a:pPr>
+            <a:r>
+              <a:rPr sz="2400" b="1" lang="ja-JP">
+                <a:solidFill>
+                  <a:srgbClr val="0017C1"/>
+                </a:solidFill>
+                <a:latin typeface="Noto Sans JP"/>
+                <a:ea typeface="Noto Sans JP"/>
+              </a:rPr>
+              <a:t>自分次第</a:t>
+            </a:r>
+          </a:p>
+          <a:p>
+            <a:pPr algn="l">
+              <a:lnSpc>
+                <a:spcPts val="2240"/>
+              </a:lnSpc>
+              <a:spcBef>
+                <a:spcPts val="0"/>
+              </a:spcBef>
+              <a:spcAft>
                 <a:spcPts val="900"/>
               </a:spcAft>
             </a:pPr>
             <a:r>
-              <a:rPr sz="2400" b="1" lang="ja-JP">
-                <a:solidFill>
-                  <a:srgbClr val="0017C1"/>
+              <a:rPr sz="1600" b="0" lang="ja-JP">
+                <a:solidFill>
+                  <a:srgbClr val="666666"/>
                 </a:solidFill>
                 <a:latin typeface="Noto Sans JP"/>
                 <a:ea typeface="Noto Sans JP"/>
               </a:rPr>
-              <a:t>自分次第（自分の行い）</a:t>
+              <a:t>自分の行い</a:t>
             </a:r>
           </a:p>
           <a:p>
@@ -8989,14 +9012,14 @@
       </p:sp>
       <p:sp>
         <p:nvSpPr>
-          <p:cNvPr id="6" name="自分次第でない（自分の行いでない）の面"/>
+          <p:cNvPr id="6" name="自分次第でないの面"/>
           <p:cNvSpPr/>
           <p:nvPr/>
         </p:nvSpPr>
         <p:spPr>
           <a:xfrm>
             <a:off x="6400800" y="1752600"/>
-            <a:ext cx="5181600" cy="3482340"/>
+            <a:ext cx="5181600" cy="3340100"/>
           </a:xfrm>
           <a:prstGeom prst="rect">
             <a:avLst/>
@@ -9027,7 +9050,7 @@
         <p:spPr>
           <a:xfrm>
             <a:off x="6705600" y="2019300"/>
-            <a:ext cx="4572000" cy="2948940"/>
+            <a:ext cx="4572000" cy="2806700"/>
           </a:xfrm>
           <a:prstGeom prst="rect">
             <a:avLst/>
@@ -9048,18 +9071,41 @@
                 <a:spcPts val="0"/>
               </a:spcBef>
               <a:spcAft>
+                <a:spcPts val="0"/>
+              </a:spcAft>
+            </a:pPr>
+            <a:r>
+              <a:rPr sz="2400" b="1" lang="ja-JP">
+                <a:solidFill>
+                  <a:srgbClr val="1A1A1A"/>
+                </a:solidFill>
+                <a:latin typeface="Noto Sans JP"/>
+                <a:ea typeface="Noto Sans JP"/>
+              </a:rPr>
+              <a:t>自分次第でない</a:t>
+            </a:r>
+          </a:p>
+          <a:p>
+            <a:pPr algn="l">
+              <a:lnSpc>
+                <a:spcPts val="2240"/>
+              </a:lnSpc>
+              <a:spcBef>
+                <a:spcPts val="0"/>
+              </a:spcBef>
+              <a:spcAft>
                 <a:spcPts val="900"/>
               </a:spcAft>
             </a:pPr>
             <a:r>
-              <a:rPr sz="2400" b="1" lang="ja-JP">
-                <a:solidFill>
-                  <a:srgbClr val="1A1A1A"/>
+              <a:rPr sz="1600" b="0" lang="ja-JP">
+                <a:solidFill>
+                  <a:srgbClr val="666666"/>
                 </a:solidFill>
                 <a:latin typeface="Noto Sans JP"/>
                 <a:ea typeface="Noto Sans JP"/>
               </a:rPr>
-              <a:t>自分次第でない（自分の行いでない）</a:t>
+              <a:t>自分の行いでないもの</a:t>
             </a:r>
           </a:p>
           <a:p>
@@ -9184,7 +9230,7 @@
         </p:nvSpPr>
         <p:spPr>
           <a:xfrm>
-            <a:off x="609600" y="5577840"/>
+            <a:off x="609600" y="5435600"/>
             <a:ext cx="10972800" cy="419100"/>
           </a:xfrm>
           <a:prstGeom prst="rect">
@@ -9217,7 +9263,7 @@
                 <a:latin typeface="Noto Sans JP"/>
                 <a:ea typeface="Noto Sans JP"/>
               </a:rPr>
-              <a:t>幸福は、自分次第のものを整えることに置く。</a:t>
+              <a:t>ストア派の答え　幸福は、自分次第のものを整えることに置く。</a:t>
             </a:r>
           </a:p>
         </p:txBody>
@@ -9333,7 +9379,7 @@
         </p:nvGraphicFramePr>
         <p:xfrm>
           <a:off x="609600" y="1676400"/>
-          <a:ext cx="10972800" cy="2286000"/>
+          <a:ext cx="10972800" cy="3314700"/>
         </p:xfrm>
         <a:graphic>
           <a:graphicData uri="http://schemas.openxmlformats.org/drawingml/2006/table">
@@ -9510,7 +9556,7 @@
                   </a:tcPr>
                 </a:tc>
               </a:tr>
-              <a:tr h="876300">
+              <a:tr h="1219200">
                 <a:tc>
                   <a:txBody>
                     <a:bodyPr wrap="square"/>
@@ -9643,7 +9689,30 @@
                           <a:latin typeface="Noto Sans JP"/>
                           <a:ea typeface="Noto Sans JP"/>
                         </a:rPr>
-                        <a:t>自分次第のものを整えること（ソクラテスでは、知を持つこと）</a:t>
+                        <a:t>ストア派　自分次第のものを整えること</a:t>
+                      </a:r>
+                    </a:p>
+                    <a:p>
+                      <a:pPr algn="l">
+                        <a:lnSpc>
+                          <a:spcPts val="2700"/>
+                        </a:lnSpc>
+                        <a:spcBef>
+                          <a:spcPts val="0"/>
+                        </a:spcBef>
+                        <a:spcAft>
+                          <a:spcPts val="0"/>
+                        </a:spcAft>
+                      </a:pPr>
+                      <a:r>
+                        <a:rPr sz="2000" b="0" lang="ja-JP">
+                          <a:solidFill>
+                            <a:srgbClr val="1A1A1A"/>
+                          </a:solidFill>
+                          <a:latin typeface="Noto Sans JP"/>
+                          <a:ea typeface="Noto Sans JP"/>
+                        </a:rPr>
+                        <a:t>ソクラテス　知を持つこと</a:t>
                       </a:r>
                     </a:p>
                   </a:txBody>
@@ -9674,7 +9743,7 @@
                   </a:tcPr>
                 </a:tc>
               </a:tr>
-              <a:tr h="876300">
+              <a:tr h="1562100">
                 <a:tc>
                   <a:txBody>
                     <a:bodyPr wrap="square"/>
@@ -9807,7 +9876,30 @@
                           <a:latin typeface="Noto Sans JP"/>
                           <a:ea typeface="Noto Sans JP"/>
                         </a:rPr>
-                        <a:t>自分次第でないものが奪われても、幸福は傷つかない</a:t>
+                        <a:t>ストア派　自分次第でないものが奪われても、幸福は傷つかない</a:t>
+                      </a:r>
+                    </a:p>
+                    <a:p>
+                      <a:pPr algn="l">
+                        <a:lnSpc>
+                          <a:spcPts val="2700"/>
+                        </a:lnSpc>
+                        <a:spcBef>
+                          <a:spcPts val="0"/>
+                        </a:spcBef>
+                        <a:spcAft>
+                          <a:spcPts val="0"/>
+                        </a:spcAft>
+                      </a:pPr>
+                      <a:r>
+                        <a:rPr sz="2000" b="0" lang="ja-JP">
+                          <a:solidFill>
+                            <a:srgbClr val="1A1A1A"/>
+                          </a:solidFill>
+                          <a:latin typeface="Noto Sans JP"/>
+                          <a:ea typeface="Noto Sans JP"/>
+                        </a:rPr>
+                        <a:t>ソクラテス　知があれば、行為でも結果でも誤らない</a:t>
                       </a:r>
                     </a:p>
                   </a:txBody>
@@ -9850,7 +9942,7 @@
         </p:nvSpPr>
         <p:spPr>
           <a:xfrm>
-            <a:off x="609600" y="4191000"/>
+            <a:off x="609600" y="5219700"/>
             <a:ext cx="10972800" cy="419100"/>
           </a:xfrm>
           <a:prstGeom prst="rect">
@@ -9998,7 +10090,53 @@
         <p:spPr>
           <a:xfrm>
             <a:off x="609600" y="1676400"/>
-            <a:ext cx="10972800" cy="2362200"/>
+            <a:ext cx="10972800" cy="419100"/>
+          </a:xfrm>
+          <a:prstGeom prst="rect">
+            <a:avLst/>
+          </a:prstGeom>
+          <a:noFill/>
+        </p:spPr>
+        <p:txBody>
+          <a:bodyPr wrap="square" lIns="0" rIns="0" tIns="0" bIns="0" anchor="t">
+            <a:noAutofit/>
+          </a:bodyPr>
+          <a:lstStyle/>
+          <a:p>
+            <a:pPr algn="l">
+              <a:lnSpc>
+                <a:spcPts val="3300"/>
+              </a:lnSpc>
+              <a:spcBef>
+                <a:spcPts val="0"/>
+              </a:spcBef>
+              <a:spcAft>
+                <a:spcPts val="0"/>
+              </a:spcAft>
+            </a:pPr>
+            <a:r>
+              <a:rPr sz="2200" b="0" lang="ja-JP">
+                <a:solidFill>
+                  <a:srgbClr val="1A1A1A"/>
+                </a:solidFill>
+                <a:latin typeface="Noto Sans JP"/>
+                <a:ea typeface="Noto Sans JP"/>
+              </a:rPr>
+              <a:t>認知行動療法の創始者たちは、ストア派に学んだと述べている。</a:t>
+            </a:r>
+          </a:p>
+        </p:txBody>
+      </p:sp>
+      <p:sp>
+        <p:nvSpPr>
+          <p:cNvPr id="5" name="TextBox 4"/>
+          <p:cNvSpPr txBox="1"/>
+          <p:nvPr/>
+        </p:nvSpPr>
+        <p:spPr>
+          <a:xfrm>
+            <a:off x="609600" y="2247900"/>
+            <a:ext cx="10972800" cy="1771650"/>
           </a:xfrm>
           <a:prstGeom prst="rect">
             <a:avLst/>
@@ -10035,7 +10173,7 @@
                 <a:latin typeface="Noto Sans JP"/>
                 <a:ea typeface="Noto Sans JP"/>
               </a:rPr>
-              <a:t>創始者たちの言及　</a:t>
+              <a:t>エリス　</a:t>
             </a:r>
             <a:r>
               <a:rPr sz="2200" b="0" lang="ja-JP">
@@ -10045,7 +10183,7 @@
                 <a:latin typeface="Noto Sans JP"/>
                 <a:ea typeface="Noto Sans JP"/>
               </a:rPr>
-              <a:t>ストア派に学んだとの言明</a:t>
+              <a:t>合理情動行動療法の原理の多くを、ストア派が先に述べていたとする言明</a:t>
             </a:r>
           </a:p>
           <a:p>
@@ -10073,7 +10211,7 @@
                 <a:latin typeface="Noto Sans JP"/>
                 <a:ea typeface="Noto Sans JP"/>
               </a:rPr>
-              <a:t>エリス　</a:t>
+              <a:t>ベック　</a:t>
             </a:r>
             <a:r>
               <a:rPr sz="2200" b="0" lang="ja-JP">
@@ -10083,7 +10221,7 @@
                 <a:latin typeface="Noto Sans JP"/>
                 <a:ea typeface="Noto Sans JP"/>
               </a:rPr>
-              <a:t>合理情動行動療法の原理の多くを、ストア派が先に述べていたとする言明</a:t>
+              <a:t>認知療法の哲学上の源を、ストア派にさかのぼるとする言明</a:t>
             </a:r>
           </a:p>
           <a:p>
@@ -10111,44 +10249,6 @@
                 <a:latin typeface="Noto Sans JP"/>
                 <a:ea typeface="Noto Sans JP"/>
               </a:rPr>
-              <a:t>ベック　</a:t>
-            </a:r>
-            <a:r>
-              <a:rPr sz="2200" b="0" lang="ja-JP">
-                <a:solidFill>
-                  <a:srgbClr val="1A1A1A"/>
-                </a:solidFill>
-                <a:latin typeface="Noto Sans JP"/>
-                <a:ea typeface="Noto Sans JP"/>
-              </a:rPr>
-              <a:t>認知療法の哲学上の源を、ストア派にさかのぼるとする言明</a:t>
-            </a:r>
-          </a:p>
-          <a:p>
-            <a:pPr algn="l" marL="266700" indent="-266700">
-              <a:lnSpc>
-                <a:spcPts val="3300"/>
-              </a:lnSpc>
-              <a:spcBef>
-                <a:spcPts val="0"/>
-              </a:spcBef>
-              <a:spcAft>
-                <a:spcPts val="1350"/>
-              </a:spcAft>
-              <a:buClr>
-                <a:srgbClr val="0017C1"/>
-              </a:buClr>
-              <a:buFont typeface="Arial"/>
-              <a:buChar char="•"/>
-            </a:pPr>
-            <a:r>
-              <a:rPr sz="2200" b="1" lang="ja-JP">
-                <a:solidFill>
-                  <a:srgbClr val="1A1A1A"/>
-                </a:solidFill>
-                <a:latin typeface="Noto Sans JP"/>
-                <a:ea typeface="Noto Sans JP"/>
-              </a:rPr>
               <a:t>受け継いだ点　</a:t>
             </a:r>
             <a:r>
@@ -10166,13 +10266,13 @@
       </p:sp>
       <p:sp>
         <p:nvSpPr>
-          <p:cNvPr id="5" name="TextBox 4"/>
+          <p:cNvPr id="6" name="TextBox 5"/>
           <p:cNvSpPr txBox="1"/>
           <p:nvPr/>
         </p:nvSpPr>
         <p:spPr>
           <a:xfrm>
-            <a:off x="609600" y="4152900"/>
+            <a:off x="609600" y="4133850"/>
             <a:ext cx="10972800" cy="497840"/>
           </a:xfrm>
           <a:prstGeom prst="rect">
@@ -10343,7 +10443,7 @@
         <p:spPr>
           <a:xfrm>
             <a:off x="609600" y="1676400"/>
-            <a:ext cx="5715000" cy="2781300"/>
+            <a:ext cx="5867400" cy="2781300"/>
           </a:xfrm>
           <a:prstGeom prst="rect">
             <a:avLst/>
@@ -10375,7 +10475,7 @@
                 <a:latin typeface="Noto Sans JP"/>
                 <a:ea typeface="Noto Sans JP"/>
               </a:rPr>
-              <a:t>ポジティブ心理学は、人が栄える条件を研究する分野である。Seligman &amp; Csikszentmihalyi（2000）が出発点とされる。</a:t>
+              <a:t>ポジティブ心理学（Seligman &amp; Csikszentmihalyi, 2000）は、人が栄える条件を研究する分野である。</a:t>
             </a:r>
           </a:p>
           <a:p>
@@ -10412,8 +10512,8 @@
           <p:nvPr/>
         </p:nvGraphicFramePr>
         <p:xfrm>
-          <a:off x="6858000" y="1600200"/>
-          <a:ext cx="4724400" cy="4095750"/>
+          <a:off x="6705600" y="1600200"/>
+          <a:ext cx="4876800" cy="4095750"/>
         </p:xfrm>
         <a:graphic>
           <a:graphicData uri="http://schemas.openxmlformats.org/drawingml/2006/chart">
@@ -10429,8 +10529,8 @@
         </p:nvSpPr>
         <p:spPr>
           <a:xfrm>
-            <a:off x="6858000" y="5753100"/>
-            <a:ext cx="4724400" cy="248920"/>
+            <a:off x="6705600" y="5753100"/>
+            <a:ext cx="4876800" cy="248920"/>
           </a:xfrm>
           <a:prstGeom prst="rect">
             <a:avLst/>
@@ -10623,7 +10723,7 @@
         <p:spPr>
           <a:xfrm>
             <a:off x="609600" y="2286000"/>
-            <a:ext cx="4953000" cy="1600200"/>
+            <a:ext cx="4953000" cy="3562350"/>
           </a:xfrm>
           <a:prstGeom prst="rect">
             <a:avLst/>
@@ -10711,6 +10811,118 @@
               <a:t>その活動に伴う徴候</a:t>
             </a:r>
           </a:p>
+          <a:p>
+            <a:pPr algn="l" marL="266700" indent="-266700">
+              <a:lnSpc>
+                <a:spcPts val="3300"/>
+              </a:lnSpc>
+              <a:spcBef>
+                <a:spcPts val="0"/>
+              </a:spcBef>
+              <a:spcAft>
+                <a:spcPts val="1350"/>
+              </a:spcAft>
+              <a:buClr>
+                <a:srgbClr val="0017C1"/>
+              </a:buClr>
+              <a:buFont typeface="Arial"/>
+              <a:buChar char="•"/>
+            </a:pPr>
+            <a:r>
+              <a:rPr sz="2200" b="0" lang="ja-JP">
+                <a:solidFill>
+                  <a:srgbClr val="1A1A1A"/>
+                </a:solidFill>
+                <a:latin typeface="Noto Sans JP"/>
+                <a:ea typeface="Noto Sans JP"/>
+              </a:rPr>
+              <a:t>三つの条件</a:t>
+            </a:r>
+          </a:p>
+          <a:p>
+            <a:pPr algn="l" marL="533400" indent="-209550">
+              <a:lnSpc>
+                <a:spcPts val="3000"/>
+              </a:lnSpc>
+              <a:spcBef>
+                <a:spcPts val="0"/>
+              </a:spcBef>
+              <a:spcAft>
+                <a:spcPts val="600"/>
+              </a:spcAft>
+              <a:buClr>
+                <a:srgbClr val="0017C1"/>
+              </a:buClr>
+              <a:buFont typeface="Arial"/>
+              <a:buChar char="–"/>
+            </a:pPr>
+            <a:r>
+              <a:rPr sz="2000" b="0" lang="ja-JP">
+                <a:solidFill>
+                  <a:srgbClr val="1A1A1A"/>
+                </a:solidFill>
+                <a:latin typeface="Noto Sans JP"/>
+                <a:ea typeface="Noto Sans JP"/>
+              </a:rPr>
+              <a:t>①実際に活動している</a:t>
+            </a:r>
+          </a:p>
+          <a:p>
+            <a:pPr algn="l" marL="533400" indent="-209550">
+              <a:lnSpc>
+                <a:spcPts val="3000"/>
+              </a:lnSpc>
+              <a:spcBef>
+                <a:spcPts val="0"/>
+              </a:spcBef>
+              <a:spcAft>
+                <a:spcPts val="600"/>
+              </a:spcAft>
+              <a:buClr>
+                <a:srgbClr val="0017C1"/>
+              </a:buClr>
+              <a:buFont typeface="Arial"/>
+              <a:buChar char="–"/>
+            </a:pPr>
+            <a:r>
+              <a:rPr sz="2000" b="0" lang="ja-JP">
+                <a:solidFill>
+                  <a:srgbClr val="1A1A1A"/>
+                </a:solidFill>
+                <a:latin typeface="Noto Sans JP"/>
+                <a:ea typeface="Noto Sans JP"/>
+              </a:rPr>
+              <a:t>②自分が価値を認めている</a:t>
+            </a:r>
+          </a:p>
+          <a:p>
+            <a:pPr algn="l" marL="533400" indent="-209550">
+              <a:lnSpc>
+                <a:spcPts val="3000"/>
+              </a:lnSpc>
+              <a:spcBef>
+                <a:spcPts val="0"/>
+              </a:spcBef>
+              <a:spcAft>
+                <a:spcPts val="600"/>
+              </a:spcAft>
+              <a:buClr>
+                <a:srgbClr val="0017C1"/>
+              </a:buClr>
+              <a:buFont typeface="Arial"/>
+              <a:buChar char="–"/>
+            </a:pPr>
+            <a:r>
+              <a:rPr sz="2000" b="0" lang="ja-JP">
+                <a:solidFill>
+                  <a:srgbClr val="1A1A1A"/>
+                </a:solidFill>
+                <a:latin typeface="Noto Sans JP"/>
+                <a:ea typeface="Noto Sans JP"/>
+              </a:rPr>
+              <a:t>③その活動に実際に価値がある</a:t>
+            </a:r>
+          </a:p>
         </p:txBody>
       </p:sp>
       <p:sp>
@@ -10722,7 +10934,7 @@
         <p:spPr>
           <a:xfrm>
             <a:off x="6400800" y="1752600"/>
-            <a:ext cx="5181600" cy="4155440"/>
+            <a:ext cx="5181600" cy="4269740"/>
           </a:xfrm>
           <a:prstGeom prst="rect">
             <a:avLst/>
@@ -10751,7 +10963,7 @@
         <p:spPr>
           <a:xfrm>
             <a:off x="6705600" y="2057400"/>
-            <a:ext cx="4572000" cy="3545840"/>
+            <a:ext cx="4572000" cy="3660140"/>
           </a:xfrm>
           <a:prstGeom prst="rect">
             <a:avLst/>
@@ -10818,7 +11030,7 @@
                 <a:spcPts val="0"/>
               </a:spcBef>
               <a:spcAft>
-                <a:spcPts val="0"/>
+                <a:spcPts val="450"/>
               </a:spcAft>
             </a:pPr>
             <a:r>
@@ -10829,7 +11041,30 @@
                 <a:latin typeface="Noto Sans JP"/>
                 <a:ea typeface="Noto Sans JP"/>
               </a:rPr>
-              <a:t>幸福という語は、もともと人の力の外から授かるものを指していた。いまは、自分の手で手に入れるものと考えることが多い。</a:t>
+              <a:t>幸福という語は、もともと人の力の外から授かるものを指していた。</a:t>
+            </a:r>
+          </a:p>
+          <a:p>
+            <a:pPr algn="l">
+              <a:lnSpc>
+                <a:spcPts val="3300"/>
+              </a:lnSpc>
+              <a:spcBef>
+                <a:spcPts val="0"/>
+              </a:spcBef>
+              <a:spcAft>
+                <a:spcPts val="450"/>
+              </a:spcAft>
+            </a:pPr>
+            <a:r>
+              <a:rPr sz="2200" b="0" lang="ja-JP">
+                <a:solidFill>
+                  <a:srgbClr val="1A1A1A"/>
+                </a:solidFill>
+                <a:latin typeface="Noto Sans JP"/>
+                <a:ea typeface="Noto Sans JP"/>
+              </a:rPr>
+              <a:t>いまは、自分の手で手に入れるものと考えることが多い。</a:t>
             </a:r>
           </a:p>
         </p:txBody>
@@ -11540,7 +11775,7 @@
         <p:spPr>
           <a:xfrm>
             <a:off x="609600" y="1676400"/>
-            <a:ext cx="10972800" cy="3371850"/>
+            <a:ext cx="10972800" cy="3200400"/>
           </a:xfrm>
           <a:prstGeom prst="rect">
             <a:avLst/>
@@ -11587,45 +11822,7 @@
                 <a:latin typeface="Noto Sans JP"/>
                 <a:ea typeface="Noto Sans JP"/>
               </a:rPr>
-              <a:t>集団の個人差の説明割合であり、一人の幸福感の内訳ではないこと</a:t>
-            </a:r>
-          </a:p>
-          <a:p>
-            <a:pPr algn="l" marL="266700" indent="-266700">
-              <a:lnSpc>
-                <a:spcPts val="3300"/>
-              </a:lnSpc>
-              <a:spcBef>
-                <a:spcPts val="0"/>
-              </a:spcBef>
-              <a:spcAft>
-                <a:spcPts val="1350"/>
-              </a:spcAft>
-              <a:buClr>
-                <a:srgbClr val="0017C1"/>
-              </a:buClr>
-              <a:buFont typeface="Arial"/>
-              <a:buChar char="•"/>
-            </a:pPr>
-            <a:r>
-              <a:rPr sz="2200" b="1" lang="ja-JP">
-                <a:solidFill>
-                  <a:srgbClr val="1A1A1A"/>
-                </a:solidFill>
-                <a:latin typeface="Noto Sans JP"/>
-                <a:ea typeface="Noto Sans JP"/>
-              </a:rPr>
-              <a:t>集団と個人　</a:t>
-            </a:r>
-            <a:r>
-              <a:rPr sz="2200" b="0" lang="ja-JP">
-                <a:solidFill>
-                  <a:srgbClr val="1A1A1A"/>
-                </a:solidFill>
-                <a:latin typeface="Noto Sans JP"/>
-                <a:ea typeface="Noto Sans JP"/>
-              </a:rPr>
-              <a:t>集団で当てはまる数字が、個人にも当てはまるとは限らないこと</a:t>
+              <a:t>集団の個人差の説明割合であり、一人の幸福感の内訳でも、個人に当てはまる数字でもないこと</a:t>
             </a:r>
           </a:p>
           <a:p>
@@ -11916,13 +12113,59 @@
       </p:sp>
       <p:sp>
         <p:nvSpPr>
-          <p:cNvPr id="5" name="結びの面"/>
+          <p:cNvPr id="5" name="TextBox 4"/>
+          <p:cNvSpPr txBox="1"/>
+          <p:nvPr/>
+        </p:nvSpPr>
+        <p:spPr>
+          <a:xfrm>
+            <a:off x="609600" y="3733800"/>
+            <a:ext cx="10972800" cy="284480"/>
+          </a:xfrm>
+          <a:prstGeom prst="rect">
+            <a:avLst/>
+          </a:prstGeom>
+          <a:noFill/>
+        </p:spPr>
+        <p:txBody>
+          <a:bodyPr wrap="square" lIns="0" rIns="0" tIns="0" bIns="0" anchor="t">
+            <a:noAutofit/>
+          </a:bodyPr>
+          <a:lstStyle/>
+          <a:p>
+            <a:pPr algn="l">
+              <a:lnSpc>
+                <a:spcPts val="2240"/>
+              </a:lnSpc>
+              <a:spcBef>
+                <a:spcPts val="0"/>
+              </a:spcBef>
+              <a:spcAft>
+                <a:spcPts val="0"/>
+              </a:spcAft>
+            </a:pPr>
+            <a:r>
+              <a:rPr sz="1600" b="0" lang="ja-JP">
+                <a:solidFill>
+                  <a:srgbClr val="666666"/>
+                </a:solidFill>
+                <a:latin typeface="Noto Sans JP"/>
+                <a:ea typeface="Noto Sans JP"/>
+              </a:rPr>
+              <a:t>身長の例は、一般に知られた事実による</a:t>
+            </a:r>
+          </a:p>
+        </p:txBody>
+      </p:sp>
+      <p:sp>
+        <p:nvSpPr>
+          <p:cNvPr id="6" name="結びの面"/>
           <p:cNvSpPr/>
           <p:nvPr/>
         </p:nvSpPr>
         <p:spPr>
           <a:xfrm>
-            <a:off x="609600" y="3771900"/>
+            <a:off x="609600" y="4208780"/>
             <a:ext cx="10972800" cy="1219200"/>
           </a:xfrm>
           <a:prstGeom prst="rect">
@@ -11945,13 +12188,13 @@
       </p:sp>
       <p:sp>
         <p:nvSpPr>
-          <p:cNvPr id="6" name="TextBox 5"/>
+          <p:cNvPr id="7" name="TextBox 6"/>
           <p:cNvSpPr txBox="1"/>
           <p:nvPr/>
         </p:nvSpPr>
         <p:spPr>
           <a:xfrm>
-            <a:off x="914400" y="3962400"/>
+            <a:off x="914400" y="4399280"/>
             <a:ext cx="10363200" cy="838200"/>
           </a:xfrm>
           <a:prstGeom prst="rect">
@@ -12955,7 +13198,7 @@
                 <a:latin typeface="Noto Sans JP"/>
                 <a:ea typeface="Noto Sans JP"/>
               </a:rPr>
-              <a:t>なぜ逆効果になるのか</a:t>
+              <a:t>なぜ幸福の追求は逆効果になるのか</a:t>
             </a:r>
           </a:p>
         </p:txBody>
@@ -12969,7 +13212,7 @@
         <p:spPr>
           <a:xfrm>
             <a:off x="609600" y="1676400"/>
-            <a:ext cx="5334000" cy="647700"/>
+            <a:ext cx="4953000" cy="647700"/>
           </a:xfrm>
           <a:prstGeom prst="rect">
             <a:avLst/>
@@ -13019,7 +13262,7 @@
         </p:nvCxnSpPr>
         <p:spPr>
           <a:xfrm>
-            <a:off x="3276600" y="2324100"/>
+            <a:off x="3086100" y="2324100"/>
             <a:ext cx="0" cy="266700"/>
           </a:xfrm>
           <a:prstGeom prst="line">
@@ -13042,7 +13285,7 @@
         <p:spPr>
           <a:xfrm>
             <a:off x="609600" y="2590800"/>
-            <a:ext cx="5334000" cy="647700"/>
+            <a:ext cx="4953000" cy="647700"/>
           </a:xfrm>
           <a:prstGeom prst="rect">
             <a:avLst/>
@@ -13092,7 +13335,7 @@
         </p:nvCxnSpPr>
         <p:spPr>
           <a:xfrm>
-            <a:off x="3276600" y="3238500"/>
+            <a:off x="3086100" y="3238500"/>
             <a:ext cx="0" cy="266700"/>
           </a:xfrm>
           <a:prstGeom prst="line">
@@ -13115,7 +13358,7 @@
         <p:spPr>
           <a:xfrm>
             <a:off x="609600" y="3505200"/>
-            <a:ext cx="5334000" cy="647700"/>
+            <a:ext cx="4953000" cy="647700"/>
           </a:xfrm>
           <a:prstGeom prst="rect">
             <a:avLst/>
@@ -13165,7 +13408,7 @@
         </p:nvCxnSpPr>
         <p:spPr>
           <a:xfrm>
-            <a:off x="3276600" y="4152900"/>
+            <a:off x="3086100" y="4152900"/>
             <a:ext cx="0" cy="266700"/>
           </a:xfrm>
           <a:prstGeom prst="line">
@@ -13188,7 +13431,7 @@
         <p:spPr>
           <a:xfrm>
             <a:off x="609600" y="4419600"/>
-            <a:ext cx="5334000" cy="647700"/>
+            <a:ext cx="4953000" cy="647700"/>
           </a:xfrm>
           <a:prstGeom prst="rect">
             <a:avLst/>
@@ -13238,8 +13481,8 @@
         </p:nvSpPr>
         <p:spPr>
           <a:xfrm>
-            <a:off x="7010400" y="1676400"/>
-            <a:ext cx="4572000" cy="1257300"/>
+            <a:off x="6096000" y="1676400"/>
+            <a:ext cx="5486400" cy="1257300"/>
           </a:xfrm>
           <a:prstGeom prst="rect">
             <a:avLst/>
@@ -13271,7 +13514,7 @@
                 <a:latin typeface="Noto Sans JP"/>
                 <a:ea typeface="Noto Sans JP"/>
               </a:rPr>
-              <a:t>前回の例にあてはめると、顔色だけを整えても、健康にはならない。徴候を直接追うと、外れやすい。</a:t>
+              <a:t>前回の例（顔色）にあてはめると、顔色だけを整えても、健康にはならない。徴候を直接追うと、外れやすい。</a:t>
             </a:r>
           </a:p>
         </p:txBody>
@@ -13387,7 +13630,7 @@
         </p:nvGraphicFramePr>
         <p:xfrm>
           <a:off x="609600" y="1676400"/>
-          <a:ext cx="10972800" cy="2819400"/>
+          <a:ext cx="10972800" cy="2133600"/>
         </p:xfrm>
         <a:graphic>
           <a:graphicData uri="http://schemas.openxmlformats.org/drawingml/2006/table">
@@ -13728,7 +13971,7 @@
                   </a:tcPr>
                 </a:tc>
               </a:tr>
-              <a:tr h="1219200">
+              <a:tr h="533400">
                 <a:tc>
                   <a:txBody>
                     <a:bodyPr wrap="square"/>
@@ -13861,7 +14104,7 @@
                           <a:latin typeface="Noto Sans JP"/>
                           <a:ea typeface="Noto Sans JP"/>
                         </a:rPr>
-                        <a:t>幸福感が、あとから伴う（前回の定義からの読み。この回のデータが示したものではない）</a:t>
+                        <a:t>幸福感が、あとから伴う</a:t>
                       </a:r>
                     </a:p>
                   </a:txBody>
@@ -14060,6 +14303,52 @@
           </a:graphicData>
         </a:graphic>
       </p:graphicFrame>
+      <p:sp>
+        <p:nvSpPr>
+          <p:cNvPr id="5" name="TextBox 4"/>
+          <p:cNvSpPr txBox="1"/>
+          <p:nvPr/>
+        </p:nvSpPr>
+        <p:spPr>
+          <a:xfrm>
+            <a:off x="609600" y="4038600"/>
+            <a:ext cx="10972800" cy="284480"/>
+          </a:xfrm>
+          <a:prstGeom prst="rect">
+            <a:avLst/>
+          </a:prstGeom>
+          <a:noFill/>
+        </p:spPr>
+        <p:txBody>
+          <a:bodyPr wrap="square" lIns="0" rIns="0" tIns="0" bIns="0" anchor="t">
+            <a:noAutofit/>
+          </a:bodyPr>
+          <a:lstStyle/>
+          <a:p>
+            <a:pPr algn="l">
+              <a:lnSpc>
+                <a:spcPts val="2240"/>
+              </a:lnSpc>
+              <a:spcBef>
+                <a:spcPts val="0"/>
+              </a:spcBef>
+              <a:spcAft>
+                <a:spcPts val="0"/>
+              </a:spcAft>
+            </a:pPr>
+            <a:r>
+              <a:rPr sz="1600" b="0" lang="ja-JP">
+                <a:solidFill>
+                  <a:srgbClr val="666666"/>
+                </a:solidFill>
+                <a:latin typeface="Noto Sans JP"/>
+                <a:ea typeface="Noto Sans JP"/>
+              </a:rPr>
+              <a:t>「あとから伴う」は、前回の定義からの読みであり、この回のデータが示したものではない</a:t>
+            </a:r>
+          </a:p>
+        </p:txBody>
+      </p:sp>
     </p:spTree>
   </p:cSld>
   <p:clrMapOvr>
@@ -15967,7 +16256,7 @@
       </p:sp>
       <p:graphicFrame>
         <p:nvGraphicFramePr>
-          <p:cNvPr id="4" name="表" descr="まとめ　変えられるところ、変えられないところの表"/>
+          <p:cNvPr id="4" name="表" descr="変えられるところと変えられないところのまとめ表"/>
           <p:cNvGraphicFramePr>
             <a:graphicFrameLocks noGrp="1"/>
           </p:cNvGraphicFramePr>
@@ -16493,7 +16782,7 @@
         <p:spPr>
           <a:xfrm>
             <a:off x="609600" y="4191000"/>
-            <a:ext cx="10972800" cy="838200"/>
+            <a:ext cx="10972800" cy="419100"/>
           </a:xfrm>
           <a:prstGeom prst="rect">
             <a:avLst/>
@@ -16525,7 +16814,92 @@
                 <a:latin typeface="Noto Sans JP"/>
                 <a:ea typeface="Noto Sans JP"/>
               </a:rPr>
-              <a:t>遺伝率は、変えられなさを意味しない。この回の答えは、ソクラテスとストア派に近い。外から壊されるところが残るなら、それで足りるのか。次回に問う。</a:t>
+              <a:t>遺伝率は、変えられなさを意味しない。</a:t>
+            </a:r>
+          </a:p>
+        </p:txBody>
+      </p:sp>
+      <p:sp>
+        <p:nvSpPr>
+          <p:cNvPr id="6" name="次回の問いの面"/>
+          <p:cNvSpPr/>
+          <p:nvPr/>
+        </p:nvSpPr>
+        <p:spPr>
+          <a:xfrm>
+            <a:off x="609600" y="4800600"/>
+            <a:ext cx="10972800" cy="1219200"/>
+          </a:xfrm>
+          <a:prstGeom prst="rect">
+            <a:avLst/>
+          </a:prstGeom>
+          <a:solidFill>
+            <a:srgbClr val="E8F1FE"/>
+          </a:solidFill>
+          <a:ln>
+            <a:noFill/>
+          </a:ln>
+        </p:spPr>
+        <p:txBody>
+          <a:bodyPr rtlCol="0" anchor="ctr"/>
+          <a:lstStyle/>
+          <a:p>
+            <a:pPr algn="ctr"/>
+          </a:p>
+        </p:txBody>
+      </p:sp>
+      <p:sp>
+        <p:nvSpPr>
+          <p:cNvPr id="7" name="TextBox 6"/>
+          <p:cNvSpPr txBox="1"/>
+          <p:nvPr/>
+        </p:nvSpPr>
+        <p:spPr>
+          <a:xfrm>
+            <a:off x="914400" y="4991100"/>
+            <a:ext cx="10363200" cy="838200"/>
+          </a:xfrm>
+          <a:prstGeom prst="rect">
+            <a:avLst/>
+          </a:prstGeom>
+          <a:noFill/>
+        </p:spPr>
+        <p:txBody>
+          <a:bodyPr wrap="square" lIns="0" rIns="0" tIns="0" bIns="0" anchor="t">
+            <a:noAutofit/>
+          </a:bodyPr>
+          <a:lstStyle/>
+          <a:p>
+            <a:pPr algn="l">
+              <a:lnSpc>
+                <a:spcPts val="3300"/>
+              </a:lnSpc>
+              <a:spcBef>
+                <a:spcPts val="0"/>
+              </a:spcBef>
+              <a:spcAft>
+                <a:spcPts val="0"/>
+              </a:spcAft>
+            </a:pPr>
+            <a:r>
+              <a:rPr sz="2200" b="1" lang="ja-JP">
+                <a:solidFill>
+                  <a:srgbClr val="0017C1"/>
+                </a:solidFill>
+                <a:latin typeface="Noto Sans JP"/>
+                <a:ea typeface="Noto Sans JP"/>
+              </a:rPr>
+              <a:t>次回の問い　</a:t>
+            </a:r>
+            <a:r>
+              <a:rPr sz="2200" b="0" lang="ja-JP">
+                <a:solidFill>
+                  <a:srgbClr val="1A1A1A"/>
+                </a:solidFill>
+                <a:latin typeface="Noto Sans JP"/>
+                <a:ea typeface="Noto Sans JP"/>
+              </a:rPr>
+              <a:t>この回の議論は、ソクラテスとストア派の方向に進んだ。外から壊されるところが残るなら、それで足りるのか。</a:t>
             </a:r>
           </a:p>
         </p:txBody>
@@ -16724,7 +17098,7 @@
                           <a:latin typeface="Noto Sans JP"/>
                           <a:ea typeface="Noto Sans JP"/>
                         </a:rPr>
-                        <a:t>何が分かるか</a:t>
+                        <a:t>区分</a:t>
                       </a:r>
                     </a:p>
                   </a:txBody>
@@ -18060,7 +18434,7 @@
         <p:spPr>
           <a:xfrm>
             <a:off x="609600" y="1676400"/>
-            <a:ext cx="10972800" cy="1257300"/>
+            <a:ext cx="10972800" cy="838200"/>
           </a:xfrm>
           <a:prstGeom prst="rect">
             <a:avLst/>
@@ -18092,7 +18466,7 @@
                 <a:latin typeface="Noto Sans JP"/>
                 <a:ea typeface="Noto Sans JP"/>
               </a:rPr>
-              <a:t>良いことも悪いことも、時間がたつと慣れて、気分は元の水準に戻りやすい。この傾向は、歩いても同じ場所に戻る踏み車にたとえて、「享楽の踏み車」（hedonic treadmill）と呼ばれる。</a:t>
+              <a:t>良いことも悪いことも、時間がたつと慣れて、気分は元の水準に戻りやすい。この傾向は、歩いても同じ場所に戻る踏み車にたとえて、「享楽の踏み車」と呼ばれる。</a:t>
             </a:r>
           </a:p>
         </p:txBody>
@@ -18105,8 +18479,8 @@
         </p:nvCxnSpPr>
         <p:spPr>
           <a:xfrm>
-            <a:off x="1143000" y="3124200"/>
-            <a:ext cx="0" cy="2705100"/>
+            <a:off x="1143000" y="2705100"/>
+            <a:ext cx="0" cy="3124200"/>
           </a:xfrm>
           <a:prstGeom prst="line">
             <a:avLst/>
@@ -18148,7 +18522,7 @@
         </p:nvCxnSpPr>
         <p:spPr>
           <a:xfrm>
-            <a:off x="1143000" y="4476750"/>
+            <a:off x="1143000" y="4267200"/>
             <a:ext cx="10191750" cy="0"/>
           </a:xfrm>
           <a:prstGeom prst="line">
@@ -18170,7 +18544,7 @@
         </p:nvSpPr>
         <p:spPr>
           <a:xfrm>
-            <a:off x="1257300" y="3086100"/>
+            <a:off x="1257300" y="2667000"/>
             <a:ext cx="1143000" cy="243840"/>
           </a:xfrm>
           <a:prstGeom prst="rect">
@@ -18262,7 +18636,7 @@
         </p:nvSpPr>
         <p:spPr>
           <a:xfrm>
-            <a:off x="9525000" y="4210050"/>
+            <a:off x="9525000" y="4000500"/>
             <a:ext cx="1809750" cy="243840"/>
           </a:xfrm>
           <a:prstGeom prst="rect">
@@ -18308,8 +18682,8 @@
         </p:nvSpPr>
         <p:spPr>
           <a:xfrm>
-            <a:off x="1333500" y="3467100"/>
-            <a:ext cx="4914900" cy="1009650"/>
+            <a:off x="1333500" y="3048000"/>
+            <a:ext cx="4914900" cy="1219200"/>
           </a:xfrm>
           <a:custGeom>
             <a:avLst/>
@@ -18318,90 +18692,90 @@
             <a:cxnLst/>
             <a:rect l="l" t="t" r="r" b="b"/>
             <a:pathLst>
-              <a:path w="4914900" h="1009650">
+              <a:path w="4914900" h="1219200">
                 <a:moveTo>
-                  <a:pt x="0" y="1009650"/>
+                  <a:pt x="0" y="1219200"/>
                 </a:moveTo>
                 <a:lnTo>
-                  <a:pt x="1524000" y="1009650"/>
+                  <a:pt x="1524000" y="1219200"/>
                 </a:lnTo>
                 <a:lnTo>
                   <a:pt x="1581150" y="0"/>
                 </a:lnTo>
                 <a:lnTo>
-                  <a:pt x="1714500" y="157844"/>
+                  <a:pt x="1714500" y="190604"/>
                 </a:lnTo>
                 <a:lnTo>
-                  <a:pt x="1847850" y="291011"/>
+                  <a:pt x="1847850" y="351410"/>
                 </a:lnTo>
                 <a:lnTo>
-                  <a:pt x="1981200" y="403360"/>
+                  <a:pt x="1981200" y="487076"/>
                 </a:lnTo>
                 <a:lnTo>
-                  <a:pt x="2114550" y="498144"/>
+                  <a:pt x="2114550" y="601533"/>
                 </a:lnTo>
                 <a:lnTo>
-                  <a:pt x="2247900" y="578111"/>
+                  <a:pt x="2247900" y="698096"/>
                 </a:lnTo>
                 <a:lnTo>
-                  <a:pt x="2381250" y="645575"/>
+                  <a:pt x="2381250" y="779563"/>
                 </a:lnTo>
                 <a:lnTo>
-                  <a:pt x="2514600" y="702493"/>
+                  <a:pt x="2514600" y="848293"/>
                 </a:lnTo>
                 <a:lnTo>
-                  <a:pt x="2647950" y="750512"/>
+                  <a:pt x="2647950" y="906279"/>
                 </a:lnTo>
                 <a:lnTo>
-                  <a:pt x="2781300" y="791025"/>
+                  <a:pt x="2781300" y="955200"/>
                 </a:lnTo>
                 <a:lnTo>
-                  <a:pt x="2914650" y="825204"/>
+                  <a:pt x="2914650" y="996472"/>
                 </a:lnTo>
                 <a:lnTo>
-                  <a:pt x="3048000" y="854039"/>
+                  <a:pt x="3048000" y="1031292"/>
                 </a:lnTo>
                 <a:lnTo>
-                  <a:pt x="3181350" y="878367"/>
+                  <a:pt x="3181350" y="1060669"/>
                 </a:lnTo>
                 <a:lnTo>
-                  <a:pt x="3314700" y="898891"/>
+                  <a:pt x="3314700" y="1085453"/>
                 </a:lnTo>
                 <a:lnTo>
-                  <a:pt x="3448050" y="916206"/>
+                  <a:pt x="3448050" y="1106362"/>
                 </a:lnTo>
                 <a:lnTo>
-                  <a:pt x="3581400" y="930815"/>
+                  <a:pt x="3581400" y="1124003"/>
                 </a:lnTo>
                 <a:lnTo>
-                  <a:pt x="3714750" y="943140"/>
+                  <a:pt x="3714750" y="1138885"/>
                 </a:lnTo>
                 <a:lnTo>
-                  <a:pt x="3848100" y="953537"/>
+                  <a:pt x="3848100" y="1151441"/>
                 </a:lnTo>
                 <a:lnTo>
-                  <a:pt x="3981450" y="962310"/>
+                  <a:pt x="3981450" y="1162035"/>
                 </a:lnTo>
                 <a:lnTo>
-                  <a:pt x="4114800" y="969711"/>
+                  <a:pt x="4114800" y="1170971"/>
                 </a:lnTo>
                 <a:lnTo>
-                  <a:pt x="4248150" y="975955"/>
+                  <a:pt x="4248150" y="1178511"/>
                 </a:lnTo>
                 <a:lnTo>
-                  <a:pt x="4381500" y="981222"/>
+                  <a:pt x="4381500" y="1184872"/>
                 </a:lnTo>
                 <a:lnTo>
-                  <a:pt x="4514850" y="985667"/>
+                  <a:pt x="4514850" y="1190239"/>
                 </a:lnTo>
                 <a:lnTo>
-                  <a:pt x="4648200" y="989416"/>
+                  <a:pt x="4648200" y="1194767"/>
                 </a:lnTo>
                 <a:lnTo>
-                  <a:pt x="4781550" y="992579"/>
+                  <a:pt x="4781550" y="1198586"/>
                 </a:lnTo>
                 <a:lnTo>
-                  <a:pt x="4914900" y="1009650"/>
+                  <a:pt x="4914900" y="1219200"/>
                 </a:lnTo>
               </a:path>
             </a:pathLst>
@@ -18429,7 +18803,7 @@
         </p:nvSpPr>
         <p:spPr>
           <a:xfrm>
-            <a:off x="3105150" y="3143250"/>
+            <a:off x="3105150" y="2724150"/>
             <a:ext cx="3143250" cy="274320"/>
           </a:xfrm>
           <a:prstGeom prst="rect">
@@ -18475,8 +18849,8 @@
         </p:nvSpPr>
         <p:spPr>
           <a:xfrm>
-            <a:off x="6667500" y="4476750"/>
-            <a:ext cx="3771900" cy="1009650"/>
+            <a:off x="6667500" y="4267200"/>
+            <a:ext cx="3771900" cy="1219200"/>
           </a:xfrm>
           <a:custGeom>
             <a:avLst/>
@@ -18485,7 +18859,7 @@
             <a:cxnLst/>
             <a:rect l="l" t="t" r="r" b="b"/>
             <a:pathLst>
-              <a:path w="3771900" h="1009650">
+              <a:path w="3771900" h="1219200">
                 <a:moveTo>
                   <a:pt x="0" y="0"/>
                 </a:moveTo>
@@ -18493,79 +18867,79 @@
                   <a:pt x="381000" y="0"/>
                 </a:lnTo>
                 <a:lnTo>
-                  <a:pt x="438150" y="1009650"/>
+                  <a:pt x="438150" y="1219200"/>
                 </a:lnTo>
                 <a:lnTo>
-                  <a:pt x="571500" y="851806"/>
+                  <a:pt x="571500" y="1028596"/>
                 </a:lnTo>
                 <a:lnTo>
-                  <a:pt x="704850" y="718639"/>
+                  <a:pt x="704850" y="867790"/>
                 </a:lnTo>
                 <a:lnTo>
-                  <a:pt x="838200" y="606290"/>
+                  <a:pt x="838200" y="732124"/>
                 </a:lnTo>
                 <a:lnTo>
-                  <a:pt x="971550" y="511506"/>
+                  <a:pt x="971550" y="617667"/>
                 </a:lnTo>
                 <a:lnTo>
-                  <a:pt x="1104900" y="431539"/>
+                  <a:pt x="1104900" y="521104"/>
                 </a:lnTo>
                 <a:lnTo>
-                  <a:pt x="1238250" y="364075"/>
+                  <a:pt x="1238250" y="439637"/>
                 </a:lnTo>
                 <a:lnTo>
-                  <a:pt x="1371600" y="307157"/>
+                  <a:pt x="1371600" y="370907"/>
                 </a:lnTo>
                 <a:lnTo>
-                  <a:pt x="1504950" y="259138"/>
+                  <a:pt x="1504950" y="312921"/>
                 </a:lnTo>
                 <a:lnTo>
-                  <a:pt x="1638300" y="218625"/>
+                  <a:pt x="1638300" y="264000"/>
                 </a:lnTo>
                 <a:lnTo>
-                  <a:pt x="1771650" y="184446"/>
+                  <a:pt x="1771650" y="222728"/>
                 </a:lnTo>
                 <a:lnTo>
-                  <a:pt x="1905000" y="155611"/>
+                  <a:pt x="1905000" y="187908"/>
                 </a:lnTo>
                 <a:lnTo>
-                  <a:pt x="2038350" y="131283"/>
+                  <a:pt x="2038350" y="158531"/>
                 </a:lnTo>
                 <a:lnTo>
-                  <a:pt x="2171700" y="110759"/>
+                  <a:pt x="2171700" y="133747"/>
                 </a:lnTo>
                 <a:lnTo>
-                  <a:pt x="2305050" y="93444"/>
+                  <a:pt x="2305050" y="112838"/>
                 </a:lnTo>
                 <a:lnTo>
-                  <a:pt x="2438400" y="78835"/>
+                  <a:pt x="2438400" y="95197"/>
                 </a:lnTo>
                 <a:lnTo>
-                  <a:pt x="2571750" y="66510"/>
+                  <a:pt x="2571750" y="80315"/>
                 </a:lnTo>
                 <a:lnTo>
-                  <a:pt x="2705100" y="56113"/>
+                  <a:pt x="2705100" y="67759"/>
                 </a:lnTo>
                 <a:lnTo>
-                  <a:pt x="2838450" y="47340"/>
+                  <a:pt x="2838450" y="57165"/>
                 </a:lnTo>
                 <a:lnTo>
-                  <a:pt x="2971800" y="39939"/>
+                  <a:pt x="2971800" y="48229"/>
                 </a:lnTo>
                 <a:lnTo>
-                  <a:pt x="3105150" y="33695"/>
+                  <a:pt x="3105150" y="40689"/>
                 </a:lnTo>
                 <a:lnTo>
-                  <a:pt x="3238500" y="28428"/>
+                  <a:pt x="3238500" y="34328"/>
                 </a:lnTo>
                 <a:lnTo>
-                  <a:pt x="3371850" y="23983"/>
+                  <a:pt x="3371850" y="28961"/>
                 </a:lnTo>
                 <a:lnTo>
-                  <a:pt x="3505200" y="20234"/>
+                  <a:pt x="3505200" y="24433"/>
                 </a:lnTo>
                 <a:lnTo>
-                  <a:pt x="3638550" y="17071"/>
+                  <a:pt x="3638550" y="20614"/>
                 </a:lnTo>
                 <a:lnTo>
                   <a:pt x="3771900" y="0"/>
@@ -18642,8 +19016,8 @@
         </p:nvCxnSpPr>
         <p:spPr>
           <a:xfrm>
-            <a:off x="2857500" y="3200400"/>
-            <a:ext cx="0" cy="2628900"/>
+            <a:off x="2857500" y="2781300"/>
+            <a:ext cx="0" cy="3048000"/>
           </a:xfrm>
           <a:prstGeom prst="line">
             <a:avLst/>
@@ -18664,8 +19038,8 @@
         </p:nvCxnSpPr>
         <p:spPr>
           <a:xfrm>
-            <a:off x="7048500" y="3200400"/>
-            <a:ext cx="0" cy="2628900"/>
+            <a:off x="7048500" y="2781300"/>
+            <a:ext cx="0" cy="3048000"/>
           </a:xfrm>
           <a:prstGeom prst="line">
             <a:avLst/>
@@ -18811,7 +19185,7 @@
                 <a:latin typeface="Noto Sans JP"/>
                 <a:ea typeface="Noto Sans JP"/>
               </a:rPr>
-              <a:t>模式図。実測値ではない　出典：Brickman &amp; Campbell 1971</a:t>
+              <a:t>hedonic treadmill　模式図。実測値ではない　出典：Brickman &amp; Campbell 1971</a:t>
             </a:r>
           </a:p>
         </p:txBody>
@@ -19683,7 +20057,7 @@
         </p:nvSpPr>
         <p:spPr>
           <a:xfrm>
-            <a:off x="609600" y="3219450"/>
+            <a:off x="609600" y="3200400"/>
             <a:ext cx="400050" cy="419100"/>
           </a:xfrm>
           <a:prstGeom prst="rect">
@@ -19712,7 +20086,7 @@
         </p:nvSpPr>
         <p:spPr>
           <a:xfrm>
-            <a:off x="1162050" y="3257550"/>
+            <a:off x="1162050" y="3238500"/>
             <a:ext cx="2476500" cy="365760"/>
           </a:xfrm>
           <a:prstGeom prst="rect">
@@ -19758,7 +20132,7 @@
         </p:nvSpPr>
         <p:spPr>
           <a:xfrm>
-            <a:off x="609600" y="3848100"/>
+            <a:off x="609600" y="3771900"/>
             <a:ext cx="10972800" cy="330200"/>
           </a:xfrm>
           <a:prstGeom prst="rect">
@@ -19804,7 +20178,7 @@
         </p:nvSpPr>
         <p:spPr>
           <a:xfrm>
-            <a:off x="609600" y="4210050"/>
+            <a:off x="609600" y="4114800"/>
             <a:ext cx="5867400" cy="419100"/>
           </a:xfrm>
           <a:prstGeom prst="rect">
@@ -19833,7 +20207,7 @@
         </p:nvSpPr>
         <p:spPr>
           <a:xfrm>
-            <a:off x="6477000" y="4210050"/>
+            <a:off x="6477000" y="4114800"/>
             <a:ext cx="1066800" cy="419100"/>
           </a:xfrm>
           <a:prstGeom prst="rect">
@@ -19864,7 +20238,7 @@
         </p:nvSpPr>
         <p:spPr>
           <a:xfrm>
-            <a:off x="7696200" y="4248150"/>
+            <a:off x="7696200" y="4152900"/>
             <a:ext cx="2476500" cy="365760"/>
           </a:xfrm>
           <a:prstGeom prst="rect">
@@ -19910,8 +20284,8 @@
         </p:nvSpPr>
         <p:spPr>
           <a:xfrm>
-            <a:off x="609600" y="4762500"/>
-            <a:ext cx="10972800" cy="248920"/>
+            <a:off x="609600" y="4610100"/>
+            <a:ext cx="10972800" cy="284480"/>
           </a:xfrm>
           <a:prstGeom prst="rect">
             <a:avLst/>
@@ -19926,7 +20300,7 @@
           <a:p>
             <a:pPr algn="l">
               <a:lnSpc>
-                <a:spcPts val="1959"/>
+                <a:spcPts val="2240"/>
               </a:lnSpc>
               <a:spcBef>
                 <a:spcPts val="0"/>
@@ -19936,7 +20310,7 @@
               </a:spcAft>
             </a:pPr>
             <a:r>
-              <a:rPr sz="1400" b="0" lang="ja-JP">
+              <a:rPr sz="1600" b="0" lang="ja-JP">
                 <a:solidFill>
                   <a:srgbClr val="666666"/>
                 </a:solidFill>
@@ -19956,7 +20330,63 @@
         </p:nvSpPr>
         <p:spPr>
           <a:xfrm>
-            <a:off x="609600" y="5067300"/>
+            <a:off x="609600" y="5066030"/>
+            <a:ext cx="10972800" cy="320040"/>
+          </a:xfrm>
+          <a:prstGeom prst="rect">
+            <a:avLst/>
+          </a:prstGeom>
+          <a:noFill/>
+        </p:spPr>
+        <p:txBody>
+          <a:bodyPr wrap="square" lIns="0" rIns="0" tIns="0" bIns="0" anchor="t">
+            <a:noAutofit/>
+          </a:bodyPr>
+          <a:lstStyle/>
+          <a:p>
+            <a:pPr algn="l">
+              <a:lnSpc>
+                <a:spcPts val="2520"/>
+              </a:lnSpc>
+              <a:spcBef>
+                <a:spcPts val="0"/>
+              </a:spcBef>
+              <a:spcAft>
+                <a:spcPts val="0"/>
+              </a:spcAft>
+            </a:pPr>
+            <a:r>
+              <a:rPr sz="1800" b="1" lang="ja-JP">
+                <a:solidFill>
+                  <a:srgbClr val="1A1A1A"/>
+                </a:solidFill>
+                <a:latin typeface="Noto Sans JP"/>
+                <a:ea typeface="Noto Sans JP"/>
+              </a:rPr>
+              <a:t>遺伝率　</a:t>
+            </a:r>
+            <a:r>
+              <a:rPr sz="1800" b="0" lang="ja-JP">
+                <a:solidFill>
+                  <a:srgbClr val="1A1A1A"/>
+                </a:solidFill>
+                <a:latin typeface="Noto Sans JP"/>
+                <a:ea typeface="Noto Sans JP"/>
+              </a:rPr>
+              <a:t>集団の個人差のうち、遺伝の差で説明できる割合</a:t>
+            </a:r>
+          </a:p>
+        </p:txBody>
+      </p:sp>
+      <p:sp>
+        <p:nvSpPr>
+          <p:cNvPr id="14" name="TextBox 13"/>
+          <p:cNvSpPr txBox="1"/>
+          <p:nvPr/>
+        </p:nvSpPr>
+        <p:spPr>
+          <a:xfrm>
+            <a:off x="609600" y="5519420"/>
             <a:ext cx="10972800" cy="838200"/>
           </a:xfrm>
           <a:prstGeom prst="rect">
@@ -19990,62 +20420,6 @@
                 <a:ea typeface="Noto Sans JP"/>
               </a:rPr>
               <a:t>4.5年後と10年後に一部の標本で再測定すると、幸福感の安定した部分の遺伝率は約80%に近づいた。</a:t>
-            </a:r>
-          </a:p>
-        </p:txBody>
-      </p:sp>
-      <p:sp>
-        <p:nvSpPr>
-          <p:cNvPr id="14" name="TextBox 13"/>
-          <p:cNvSpPr txBox="1"/>
-          <p:nvPr/>
-        </p:nvSpPr>
-        <p:spPr>
-          <a:xfrm>
-            <a:off x="609600" y="6019800"/>
-            <a:ext cx="10972800" cy="320040"/>
-          </a:xfrm>
-          <a:prstGeom prst="rect">
-            <a:avLst/>
-          </a:prstGeom>
-          <a:noFill/>
-        </p:spPr>
-        <p:txBody>
-          <a:bodyPr wrap="square" lIns="0" rIns="0" tIns="0" bIns="0" anchor="t">
-            <a:noAutofit/>
-          </a:bodyPr>
-          <a:lstStyle/>
-          <a:p>
-            <a:pPr algn="l">
-              <a:lnSpc>
-                <a:spcPts val="2520"/>
-              </a:lnSpc>
-              <a:spcBef>
-                <a:spcPts val="0"/>
-              </a:spcBef>
-              <a:spcAft>
-                <a:spcPts val="0"/>
-              </a:spcAft>
-            </a:pPr>
-            <a:r>
-              <a:rPr sz="1800" b="1" lang="ja-JP">
-                <a:solidFill>
-                  <a:srgbClr val="1A1A1A"/>
-                </a:solidFill>
-                <a:latin typeface="Noto Sans JP"/>
-                <a:ea typeface="Noto Sans JP"/>
-              </a:rPr>
-              <a:t>遺伝率　</a:t>
-            </a:r>
-            <a:r>
-              <a:rPr sz="1800" b="0" lang="ja-JP">
-                <a:solidFill>
-                  <a:srgbClr val="1A1A1A"/>
-                </a:solidFill>
-                <a:latin typeface="Noto Sans JP"/>
-                <a:ea typeface="Noto Sans JP"/>
-              </a:rPr>
-              <a:t>集団の個人差のうち、遺伝の差で説明できる割合</a:t>
             </a:r>
           </a:p>
         </p:txBody>
@@ -20994,7 +21368,7 @@
                 <a:latin typeface="Noto Sans JP"/>
                 <a:ea typeface="Noto Sans JP"/>
               </a:rPr>
-              <a:t>幸運とは何か</a:t>
+              <a:t>善いものとは何か</a:t>
             </a:r>
           </a:p>
         </p:txBody>
@@ -21101,7 +21475,7 @@
                 <a:latin typeface="Noto Sans JP"/>
                 <a:ea typeface="Noto Sans JP"/>
               </a:rPr>
-              <a:t>問い　正しく使わせるものは何か</a:t>
+              <a:t>問い　善いものを正しく使わせるもの</a:t>
             </a:r>
           </a:p>
         </p:txBody>

--- a/work/幸福_第2回/幸福_第2回.pptx
+++ b/work/幸福_第2回/幸福_第2回.pptx
@@ -7281,7 +7281,7 @@
                 <a:latin typeface="Noto Sans JP"/>
                 <a:ea typeface="Noto Sans JP"/>
               </a:rPr>
-              <a:t>ワーク（1）　置き換えは成り立つか</a:t>
+              <a:t>ワーク（1）　置き換えの成否</a:t>
             </a:r>
           </a:p>
         </p:txBody>
@@ -8534,7 +8534,7 @@
         <p:spPr>
           <a:xfrm>
             <a:off x="609600" y="2075180"/>
-            <a:ext cx="10972800" cy="2495550"/>
+            <a:ext cx="10972800" cy="3048000"/>
           </a:xfrm>
           <a:prstGeom prst="rect">
             <a:avLst/>
@@ -8641,6 +8641,19 @@
               </a:rPr>
               <a:t>は、判断、衝動、欲求、嫌悪、つまり自分の行いである。</a:t>
             </a:r>
+          </a:p>
+          <a:p>
+            <a:pPr algn="l">
+              <a:lnSpc>
+                <a:spcPts val="3300"/>
+              </a:lnSpc>
+              <a:spcBef>
+                <a:spcPts val="0"/>
+              </a:spcBef>
+              <a:spcAft>
+                <a:spcPts val="1050"/>
+              </a:spcAft>
+            </a:pPr>
             <a:r>
               <a:rPr sz="2200" b="1" lang="ja-JP">
                 <a:solidFill>
@@ -9379,7 +9392,7 @@
         </p:nvGraphicFramePr>
         <p:xfrm>
           <a:off x="609600" y="1676400"/>
-          <a:ext cx="10972800" cy="3314700"/>
+          <a:ext cx="10972800" cy="2628900"/>
         </p:xfrm>
         <a:graphic>
           <a:graphicData uri="http://schemas.openxmlformats.org/drawingml/2006/table">
@@ -9388,9 +9401,10 @@
                 <a:tableStyleId>{5C22544A-7EE6-4342-B048-85BDC9FD1C3A}</a:tableStyleId>
               </a:tblPr>
               <a:tblGrid>
-                <a:gridCol w="2286000"/>
-                <a:gridCol w="4343400"/>
-                <a:gridCol w="4343400"/>
+                <a:gridCol w="1905000"/>
+                <a:gridCol w="3162300"/>
+                <a:gridCol w="3162300"/>
+                <a:gridCol w="2743200"/>
               </a:tblGrid>
               <a:tr h="533400">
                 <a:tc>
@@ -9525,7 +9539,61 @@
                           <a:latin typeface="Noto Sans JP"/>
                           <a:ea typeface="Noto Sans JP"/>
                         </a:rPr>
-                        <a:t>ストア派とソクラテス</a:t>
+                        <a:t>ストア派</a:t>
+                      </a:r>
+                    </a:p>
+                  </a:txBody>
+                  <a:tcPr marL="152400" marR="152400" marT="95250" marB="95250" anchor="ctr">
+                    <a:lnL w="9525">
+                      <a:solidFill>
+                        <a:srgbClr val="666666"/>
+                      </a:solidFill>
+                    </a:lnL>
+                    <a:lnR w="9525">
+                      <a:solidFill>
+                        <a:srgbClr val="666666"/>
+                      </a:solidFill>
+                    </a:lnR>
+                    <a:lnT w="9525">
+                      <a:solidFill>
+                        <a:srgbClr val="666666"/>
+                      </a:solidFill>
+                    </a:lnT>
+                    <a:lnB w="9525">
+                      <a:solidFill>
+                        <a:srgbClr val="666666"/>
+                      </a:solidFill>
+                    </a:lnB>
+                    <a:solidFill>
+                      <a:srgbClr val="E8F1FE"/>
+                    </a:solidFill>
+                  </a:tcPr>
+                </a:tc>
+                <a:tc>
+                  <a:txBody>
+                    <a:bodyPr wrap="square"/>
+                    <a:lstStyle/>
+                    <a:p>
+                      <a:pPr algn="l">
+                        <a:lnSpc>
+                          <a:spcPts val="2700"/>
+                        </a:lnSpc>
+                        <a:spcBef>
+                          <a:spcPts val="0"/>
+                        </a:spcBef>
+                        <a:spcAft>
+                          <a:spcPts val="0"/>
+                        </a:spcAft>
+                      </a:pPr>
+                      <a:r>
+                        <a:rPr sz="2000" b="1" lang="ja-JP">
+                          <a:solidFill>
+                            <a:srgbClr val="1A1A1A"/>
+                          </a:solidFill>
+                          <a:latin typeface="Noto Sans JP"/>
+                          <a:ea typeface="Noto Sans JP"/>
+                        </a:rPr>
+                        <a:t>ソクラテス</a:t>
                       </a:r>
                     </a:p>
                   </a:txBody>
@@ -9556,7 +9624,7 @@
                   </a:tcPr>
                 </a:tc>
               </a:tr>
-              <a:tr h="1219200">
+              <a:tr h="876300">
                 <a:tc>
                   <a:txBody>
                     <a:bodyPr wrap="square"/>
@@ -9689,9 +9757,40 @@
                           <a:latin typeface="Noto Sans JP"/>
                           <a:ea typeface="Noto Sans JP"/>
                         </a:rPr>
-                        <a:t>ストア派　自分次第のものを整えること</a:t>
+                        <a:t>自分次第のものを整えること</a:t>
                       </a:r>
                     </a:p>
+                  </a:txBody>
+                  <a:tcPr marL="152400" marR="152400" marT="95250" marB="95250" anchor="t">
+                    <a:lnL w="9525">
+                      <a:solidFill>
+                        <a:srgbClr val="666666"/>
+                      </a:solidFill>
+                    </a:lnL>
+                    <a:lnR w="9525">
+                      <a:solidFill>
+                        <a:srgbClr val="666666"/>
+                      </a:solidFill>
+                    </a:lnR>
+                    <a:lnT w="9525">
+                      <a:solidFill>
+                        <a:srgbClr val="666666"/>
+                      </a:solidFill>
+                    </a:lnT>
+                    <a:lnB w="9525">
+                      <a:solidFill>
+                        <a:srgbClr val="666666"/>
+                      </a:solidFill>
+                    </a:lnB>
+                    <a:solidFill>
+                      <a:srgbClr val="FFFFFF"/>
+                    </a:solidFill>
+                  </a:tcPr>
+                </a:tc>
+                <a:tc>
+                  <a:txBody>
+                    <a:bodyPr wrap="square"/>
+                    <a:lstStyle/>
                     <a:p>
                       <a:pPr algn="l">
                         <a:lnSpc>
@@ -9712,7 +9811,7 @@
                           <a:latin typeface="Noto Sans JP"/>
                           <a:ea typeface="Noto Sans JP"/>
                         </a:rPr>
-                        <a:t>ソクラテス　知を持つこと</a:t>
+                        <a:t>知を持つこと</a:t>
                       </a:r>
                     </a:p>
                   </a:txBody>
@@ -9743,7 +9842,7 @@
                   </a:tcPr>
                 </a:tc>
               </a:tr>
-              <a:tr h="1562100">
+              <a:tr h="1219200">
                 <a:tc>
                   <a:txBody>
                     <a:bodyPr wrap="square"/>
@@ -9876,9 +9975,40 @@
                           <a:latin typeface="Noto Sans JP"/>
                           <a:ea typeface="Noto Sans JP"/>
                         </a:rPr>
-                        <a:t>ストア派　自分次第でないものが奪われても、幸福は傷つかない</a:t>
+                        <a:t>自分次第でないものが奪われても、幸福は傷つかない</a:t>
                       </a:r>
                     </a:p>
+                  </a:txBody>
+                  <a:tcPr marL="152400" marR="152400" marT="95250" marB="95250" anchor="t">
+                    <a:lnL w="9525">
+                      <a:solidFill>
+                        <a:srgbClr val="666666"/>
+                      </a:solidFill>
+                    </a:lnL>
+                    <a:lnR w="9525">
+                      <a:solidFill>
+                        <a:srgbClr val="666666"/>
+                      </a:solidFill>
+                    </a:lnR>
+                    <a:lnT w="9525">
+                      <a:solidFill>
+                        <a:srgbClr val="666666"/>
+                      </a:solidFill>
+                    </a:lnT>
+                    <a:lnB w="9525">
+                      <a:solidFill>
+                        <a:srgbClr val="666666"/>
+                      </a:solidFill>
+                    </a:lnB>
+                    <a:solidFill>
+                      <a:srgbClr val="FFFFFF"/>
+                    </a:solidFill>
+                  </a:tcPr>
+                </a:tc>
+                <a:tc>
+                  <a:txBody>
+                    <a:bodyPr wrap="square"/>
+                    <a:lstStyle/>
                     <a:p>
                       <a:pPr algn="l">
                         <a:lnSpc>
@@ -9899,7 +10029,7 @@
                           <a:latin typeface="Noto Sans JP"/>
                           <a:ea typeface="Noto Sans JP"/>
                         </a:rPr>
-                        <a:t>ソクラテス　知があれば、行為でも結果でも誤らない</a:t>
+                        <a:t>知があれば、行為でも結果でも誤らない</a:t>
                       </a:r>
                     </a:p>
                   </a:txBody>
@@ -9942,7 +10072,7 @@
         </p:nvSpPr>
         <p:spPr>
           <a:xfrm>
-            <a:off x="609600" y="5219700"/>
+            <a:off x="609600" y="4533900"/>
             <a:ext cx="10972800" cy="419100"/>
           </a:xfrm>
           <a:prstGeom prst="rect">
@@ -11474,7 +11604,7 @@
                 <a:latin typeface="Noto Sans JP"/>
                 <a:ea typeface="Noto Sans JP"/>
               </a:rPr>
-              <a:t>「自分の幸福感のその割合は、自分で変えられる」と読んでよいか、話し合う。</a:t>
+              <a:t>「自分の幸福感のその割合は、自分で変えられる」と読んでよいか。話し合う。</a:t>
             </a:r>
           </a:p>
         </p:txBody>
@@ -12343,7 +12473,7 @@
         </p:nvGraphicFramePr>
         <p:xfrm>
           <a:off x="609600" y="1676400"/>
-          <a:ext cx="10972800" cy="1943100"/>
+          <a:ext cx="10972800" cy="2286000"/>
         </p:xfrm>
         <a:graphic>
           <a:graphicData uri="http://schemas.openxmlformats.org/drawingml/2006/table">
@@ -12352,8 +12482,8 @@
                 <a:tableStyleId>{5C22544A-7EE6-4342-B048-85BDC9FD1C3A}</a:tableStyleId>
               </a:tblPr>
               <a:tblGrid>
-                <a:gridCol w="6019800"/>
-                <a:gridCol w="4953000"/>
+                <a:gridCol w="5334000"/>
+                <a:gridCol w="5638800"/>
               </a:tblGrid>
               <a:tr h="533400">
                 <a:tc>
@@ -12465,7 +12595,7 @@
                   </a:tcPr>
                 </a:tc>
               </a:tr>
-              <a:tr h="533400">
+              <a:tr h="876300">
                 <a:tc>
                   <a:txBody>
                     <a:bodyPr wrap="square"/>
@@ -12654,7 +12784,7 @@
                           <a:latin typeface="Noto Sans JP"/>
                           <a:ea typeface="Noto Sans JP"/>
                         </a:rPr>
-                        <a:t>個人の幸福感の40%を、自分で変えられる</a:t>
+                        <a:t>個人の幸福感の40%は、自分で変えられる</a:t>
                       </a:r>
                     </a:p>
                   </a:txBody>
@@ -12697,7 +12827,7 @@
         </p:nvSpPr>
         <p:spPr>
           <a:xfrm>
-            <a:off x="609600" y="3848100"/>
+            <a:off x="609600" y="4191000"/>
             <a:ext cx="10972800" cy="838200"/>
           </a:xfrm>
           <a:prstGeom prst="rect">
@@ -12730,7 +12860,7 @@
                 <a:latin typeface="Noto Sans JP"/>
                 <a:ea typeface="Noto Sans JP"/>
               </a:rPr>
-              <a:t>データが示すのは、幸福感が動きにくい傾向と、個人差に遺伝が関わることまでである。</a:t>
+              <a:t>データが示すのは、幸福感の動きにくい傾向と、個人差に遺伝が関わることまでである。</a:t>
             </a:r>
           </a:p>
         </p:txBody>
@@ -12743,7 +12873,7 @@
         </p:nvSpPr>
         <p:spPr>
           <a:xfrm>
-            <a:off x="609600" y="4762500"/>
+            <a:off x="609600" y="5105400"/>
             <a:ext cx="10972800" cy="838200"/>
           </a:xfrm>
           <a:prstGeom prst="rect">
@@ -13097,7 +13227,7 @@
                 <a:latin typeface="Noto Sans JP"/>
                 <a:ea typeface="Noto Sans JP"/>
               </a:rPr>
-              <a:t>幸福を強く求めることが、幸福が手の届くところにあるときに、かえって幸福感を下げうる。</a:t>
+              <a:t>幸福を強く求めることは、幸福が手の届くところにあるとき、かえって幸福感を下げうる。</a:t>
             </a:r>
           </a:p>
         </p:txBody>
@@ -13198,7 +13328,7 @@
                 <a:latin typeface="Noto Sans JP"/>
                 <a:ea typeface="Noto Sans JP"/>
               </a:rPr>
-              <a:t>なぜ幸福の追求は逆効果になるのか</a:t>
+              <a:t>幸福の追求が逆効果になる理由</a:t>
             </a:r>
           </a:p>
         </p:txBody>
@@ -16273,9 +16403,9 @@
                 <a:tableStyleId>{5C22544A-7EE6-4342-B048-85BDC9FD1C3A}</a:tableStyleId>
               </a:tblPr>
               <a:tblGrid>
-                <a:gridCol w="2286000"/>
-                <a:gridCol w="3771900"/>
-                <a:gridCol w="4914900"/>
+                <a:gridCol w="3238500"/>
+                <a:gridCol w="3238500"/>
+                <a:gridCol w="4495800"/>
               </a:tblGrid>
               <a:tr h="533400">
                 <a:tc>
@@ -16738,7 +16868,30 @@
                           <a:latin typeface="Noto Sans JP"/>
                           <a:ea typeface="Noto Sans JP"/>
                         </a:rPr>
-                        <a:t>活動を営む条件（健康、人間関係、仕事など）</a:t>
+                        <a:t>活動を営む条件</a:t>
+                      </a:r>
+                    </a:p>
+                    <a:p>
+                      <a:pPr algn="l">
+                        <a:lnSpc>
+                          <a:spcPts val="2700"/>
+                        </a:lnSpc>
+                        <a:spcBef>
+                          <a:spcPts val="0"/>
+                        </a:spcBef>
+                        <a:spcAft>
+                          <a:spcPts val="0"/>
+                        </a:spcAft>
+                      </a:pPr>
+                      <a:r>
+                        <a:rPr sz="2000" b="0" lang="ja-JP">
+                          <a:solidFill>
+                            <a:srgbClr val="1A1A1A"/>
+                          </a:solidFill>
+                          <a:latin typeface="Noto Sans JP"/>
+                          <a:ea typeface="Noto Sans JP"/>
+                        </a:rPr>
+                        <a:t>（健康、人間関係、仕事など）</a:t>
                       </a:r>
                     </a:p>
                   </a:txBody>
@@ -20317,7 +20470,7 @@
                 <a:latin typeface="Noto Sans JP"/>
                 <a:ea typeface="Noto Sans JP"/>
               </a:rPr>
-              <a:t>幸福感の個人差（分散）のうち、各要因が関わる割合。44〜52%は幅のある推定値</a:t>
+              <a:t>幸福感の個人差（分散）のうち、各要因が関わる割合。薄い部分は、44〜52%という推定値の幅</a:t>
             </a:r>
           </a:p>
         </p:txBody>
@@ -20890,7 +21043,7 @@
         <p:spPr>
           <a:xfrm>
             <a:off x="609600" y="4191000"/>
-            <a:ext cx="10972800" cy="1219200"/>
+            <a:ext cx="10972800" cy="1295400"/>
           </a:xfrm>
           <a:prstGeom prst="rect">
             <a:avLst/>
@@ -20919,7 +21072,7 @@
         <p:spPr>
           <a:xfrm>
             <a:off x="914400" y="4381500"/>
-            <a:ext cx="10363200" cy="838200"/>
+            <a:ext cx="10363200" cy="914400"/>
           </a:xfrm>
           <a:prstGeom prst="rect">
             <a:avLst/>
@@ -20940,7 +21093,7 @@
                 <a:spcPts val="0"/>
               </a:spcBef>
               <a:spcAft>
-                <a:spcPts val="0"/>
+                <a:spcPts val="300"/>
               </a:spcAft>
             </a:pPr>
             <a:r>
@@ -20961,7 +21114,30 @@
                 <a:latin typeface="Noto Sans JP"/>
                 <a:ea typeface="Noto Sans JP"/>
               </a:rPr>
-              <a:t>生まれの影響が見えることと、変えられないことは、別である。のちに見直す。</a:t>
+              <a:t>生まれの影響が見えることと、変えられないことは、別である。</a:t>
+            </a:r>
+          </a:p>
+          <a:p>
+            <a:pPr algn="l">
+              <a:lnSpc>
+                <a:spcPts val="3300"/>
+              </a:lnSpc>
+              <a:spcBef>
+                <a:spcPts val="0"/>
+              </a:spcBef>
+              <a:spcAft>
+                <a:spcPts val="300"/>
+              </a:spcAft>
+            </a:pPr>
+            <a:r>
+              <a:rPr sz="2200" b="0" lang="ja-JP">
+                <a:solidFill>
+                  <a:srgbClr val="1A1A1A"/>
+                </a:solidFill>
+                <a:latin typeface="Noto Sans JP"/>
+                <a:ea typeface="Noto Sans JP"/>
+              </a:rPr>
+              <a:t>この見直しは、後半で行う。</a:t>
             </a:r>
           </a:p>
         </p:txBody>
